--- a/presentations/VP_Scenario_Comparison.pptx
+++ b/presentations/VP_Scenario_Comparison.pptx
@@ -6,6 +6,7 @@
   </p:sldMasterIdLst>
   <p:sldIdLst>
     <p:sldId id="256" r:id="rId7"/>
+    <p:sldId id="257" r:id="rId8"/>
   </p:sldIdLst>
   <p:sldSz cx="12191695" cy="6858000" type="screen4x3"/>
   <p:notesSz cx="6858000" cy="9144000"/>
@@ -4652,6 +4653,152 @@
 </p:sld>
 </file>
 
+<file path=ppt/slides/slide2.xml><?xml version="1.0" encoding="utf-8"?>
+<p:sld xmlns:a="http://schemas.openxmlformats.org/drawingml/2006/main" xmlns:p="http://schemas.openxmlformats.org/presentationml/2006/main" xmlns:r="http://schemas.openxmlformats.org/officeDocument/2006/relationships">
+  <p:cSld>
+    <p:spTree>
+      <p:nvGrpSpPr>
+        <p:cNvPr id="1" name=""/>
+        <p:cNvGrpSpPr/>
+        <p:nvPr/>
+      </p:nvGrpSpPr>
+      <p:grpSpPr/>
+      <p:sp>
+        <p:nvSpPr>
+          <p:cNvPr id="2" name="Rectangle 1"/>
+          <p:cNvSpPr/>
+          <p:nvPr/>
+        </p:nvSpPr>
+        <p:spPr>
+          <a:xfrm>
+            <a:off x="0" y="0"/>
+            <a:ext cx="12191695" cy="566928"/>
+          </a:xfrm>
+          <a:prstGeom prst="rect">
+            <a:avLst/>
+          </a:prstGeom>
+          <a:solidFill>
+            <a:srgbClr val="1F3B5C"/>
+          </a:solidFill>
+          <a:ln>
+            <a:noFill/>
+          </a:ln>
+        </p:spPr>
+        <p:style>
+          <a:lnRef idx="1">
+            <a:schemeClr val="accent1"/>
+          </a:lnRef>
+          <a:fillRef idx="3">
+            <a:schemeClr val="accent1"/>
+          </a:fillRef>
+          <a:effectRef idx="2">
+            <a:schemeClr val="accent1"/>
+          </a:effectRef>
+          <a:fontRef idx="minor">
+            <a:schemeClr val="lt1"/>
+          </a:fontRef>
+        </p:style>
+        <p:txBody>
+          <a:bodyPr rtlCol="0" anchor="ctr" lIns="320040"/>
+          <a:lstStyle/>
+          <a:p>
+            <a:pPr algn="ctr"/>
+            <a:r>
+              <a:rPr sz="2200" b="1">
+                <a:solidFill>
+                  <a:srgbClr val="FFFFFF"/>
+                </a:solidFill>
+                <a:latin typeface="Calibri"/>
+              </a:rPr>
+              <a:t>Program Timeline — Gantt View: Sequential vs Parallel Execution</a:t>
+            </a:r>
+          </a:p>
+        </p:txBody>
+      </p:sp>
+      <p:pic>
+        <p:nvPicPr>
+          <p:cNvPr id="3" name="Picture 2" descr="gantt.png"/>
+          <p:cNvPicPr>
+            <a:picLocks noChangeAspect="1"/>
+          </p:cNvPicPr>
+          <p:nvPr/>
+        </p:nvPicPr>
+        <p:blipFill>
+          <a:blip r:embed="rId2"/>
+          <a:stretch>
+            <a:fillRect/>
+          </a:stretch>
+        </p:blipFill>
+        <p:spPr>
+          <a:xfrm>
+            <a:off x="0" y="603504"/>
+            <a:ext cx="12191695" cy="5624298"/>
+          </a:xfrm>
+          <a:prstGeom prst="rect">
+            <a:avLst/>
+          </a:prstGeom>
+        </p:spPr>
+      </p:pic>
+      <p:sp>
+        <p:nvSpPr>
+          <p:cNvPr id="4" name="Rectangle 3"/>
+          <p:cNvSpPr/>
+          <p:nvPr/>
+        </p:nvSpPr>
+        <p:spPr>
+          <a:xfrm>
+            <a:off x="228600" y="6291072"/>
+            <a:ext cx="11731752" cy="457200"/>
+          </a:xfrm>
+          <a:prstGeom prst="rect">
+            <a:avLst/>
+          </a:prstGeom>
+          <a:solidFill>
+            <a:srgbClr val="1F3B5C"/>
+          </a:solidFill>
+          <a:ln>
+            <a:noFill/>
+          </a:ln>
+        </p:spPr>
+        <p:style>
+          <a:lnRef idx="1">
+            <a:schemeClr val="accent1"/>
+          </a:lnRef>
+          <a:fillRef idx="3">
+            <a:schemeClr val="accent1"/>
+          </a:fillRef>
+          <a:effectRef idx="2">
+            <a:schemeClr val="accent1"/>
+          </a:effectRef>
+          <a:fontRef idx="minor">
+            <a:schemeClr val="lt1"/>
+          </a:fontRef>
+        </p:style>
+        <p:txBody>
+          <a:bodyPr rtlCol="0" anchor="ctr" lIns="137160"/>
+          <a:lstStyle/>
+          <a:p>
+            <a:pPr algn="ctr"/>
+            <a:r>
+              <a:rPr sz="1200" b="1">
+                <a:solidFill>
+                  <a:srgbClr val="FFFFFF"/>
+                </a:solidFill>
+                <a:latin typeface="Calibri"/>
+              </a:rPr>
+              <a:t>Key takeaway:  Sequential execution reaches 4-Stage 1st production ~4 months earlier (28-Jul-28 vs 27-Nov-28) and VFD 1st production ~1 week earlier (9-May-29 vs 16-May-29), avoiding the Oct-28 EC release conflict.</a:t>
+            </a:r>
+          </a:p>
+        </p:txBody>
+      </p:sp>
+    </p:spTree>
+  </p:cSld>
+  <p:clrMapOvr>
+    <a:masterClrMapping/>
+  </p:clrMapOvr>
+</p:sld>
+</file>
+
 <file path=ppt/theme/theme1.xml><?xml version="1.0" encoding="utf-8"?>
 <a:theme xmlns:a="http://schemas.openxmlformats.org/drawingml/2006/main" name="Office Theme">
   <a:themeElements>

--- a/presentations/VP_Scenario_Comparison.pptx
+++ b/presentations/VP_Scenario_Comparison.pptx
@@ -4732,7 +4732,7 @@
         <p:spPr>
           <a:xfrm>
             <a:off x="0" y="603504"/>
-            <a:ext cx="12191695" cy="5624298"/>
+            <a:ext cx="12191695" cy="4892682"/>
           </a:xfrm>
           <a:prstGeom prst="rect">
             <a:avLst/>
@@ -4741,52 +4741,182 @@
       </p:pic>
       <p:sp>
         <p:nvSpPr>
-          <p:cNvPr id="4" name="Rectangle 3"/>
-          <p:cNvSpPr/>
+          <p:cNvPr id="4" name="TextBox 3"/>
+          <p:cNvSpPr txBox="1"/>
           <p:nvPr/>
         </p:nvSpPr>
         <p:spPr>
           <a:xfrm>
-            <a:off x="228600" y="6291072"/>
-            <a:ext cx="11731752" cy="457200"/>
+            <a:off x="228600" y="5559552"/>
+            <a:ext cx="5806440" cy="1225296"/>
           </a:xfrm>
           <a:prstGeom prst="rect">
             <a:avLst/>
           </a:prstGeom>
           <a:solidFill>
-            <a:srgbClr val="1F3B5C"/>
+            <a:srgbClr val="FFFFFF"/>
           </a:solidFill>
-          <a:ln>
-            <a:noFill/>
+          <a:ln w="9525">
+            <a:solidFill>
+              <a:srgbClr val="2E74B5"/>
+            </a:solidFill>
           </a:ln>
         </p:spPr>
-        <p:style>
-          <a:lnRef idx="1">
-            <a:schemeClr val="accent1"/>
-          </a:lnRef>
-          <a:fillRef idx="3">
-            <a:schemeClr val="accent1"/>
-          </a:fillRef>
-          <a:effectRef idx="2">
-            <a:schemeClr val="accent1"/>
-          </a:effectRef>
-          <a:fontRef idx="minor">
-            <a:schemeClr val="lt1"/>
-          </a:fontRef>
-        </p:style>
-        <p:txBody>
-          <a:bodyPr rtlCol="0" anchor="ctr" lIns="137160"/>
-          <a:lstStyle/>
-          <a:p>
-            <a:pPr algn="ctr"/>
-            <a:r>
-              <a:rPr sz="1200" b="1">
+        <p:txBody>
+          <a:bodyPr wrap="square" tIns="36576" bIns="36576">
+            <a:spAutoFit/>
+          </a:bodyPr>
+          <a:lstStyle/>
+          <a:p>
+            <a:r>
+              <a:rPr sz="1150" b="1">
                 <a:solidFill>
-                  <a:srgbClr val="FFFFFF"/>
+                  <a:srgbClr val="2E74B5"/>
                 </a:solidFill>
                 <a:latin typeface="Calibri"/>
               </a:rPr>
-              <a:t>Key takeaway:  Sequential execution reaches 4-Stage 1st production ~4 months earlier (28-Jul-28 vs 27-Nov-28) and VFD 1st production ~1 week earlier (9-May-29 vs 16-May-29), avoiding the Oct-28 EC release conflict.</a:t>
+              <a:t>Scenario 1 — Sequential Execution</a:t>
+            </a:r>
+          </a:p>
+          <a:p>
+            <a:pPr>
+              <a:spcBef>
+                <a:spcPts val="200"/>
+              </a:spcBef>
+            </a:pPr>
+            <a:r>
+              <a:rPr sz="950" b="1">
+                <a:solidFill>
+                  <a:srgbClr val="262626"/>
+                </a:solidFill>
+                <a:latin typeface="Calibri"/>
+              </a:rPr>
+              <a:t>What it is:  </a:t>
+            </a:r>
+            <a:r>
+              <a:rPr sz="950">
+                <a:solidFill>
+                  <a:srgbClr val="262626"/>
+                </a:solidFill>
+                <a:latin typeface="Calibri"/>
+              </a:rPr>
+              <a:t>Finish the entire 4-Stage program first (testing → EC release → Selection Navigator → agency submission → production release), then start the VFD compressor project.</a:t>
+            </a:r>
+          </a:p>
+          <a:p>
+            <a:pPr>
+              <a:spcBef>
+                <a:spcPts val="200"/>
+              </a:spcBef>
+            </a:pPr>
+            <a:r>
+              <a:rPr sz="950" b="1">
+                <a:solidFill>
+                  <a:srgbClr val="262626"/>
+                </a:solidFill>
+                <a:latin typeface="Calibri"/>
+              </a:rPr>
+              <a:t>Challenges:  </a:t>
+            </a:r>
+            <a:r>
+              <a:rPr sz="950">
+                <a:solidFill>
+                  <a:srgbClr val="262626"/>
+                </a:solidFill>
+                <a:latin typeface="Calibri"/>
+              </a:rPr>
+              <a:t>Refrigeration team must run VFD compressor unit testing alongside the Selection Navigator &amp; UL deliverables.</a:t>
+            </a:r>
+          </a:p>
+        </p:txBody>
+      </p:sp>
+      <p:sp>
+        <p:nvSpPr>
+          <p:cNvPr id="5" name="TextBox 4"/>
+          <p:cNvSpPr txBox="1"/>
+          <p:nvPr/>
+        </p:nvSpPr>
+        <p:spPr>
+          <a:xfrm>
+            <a:off x="6153912" y="5559552"/>
+            <a:ext cx="5806440" cy="1225296"/>
+          </a:xfrm>
+          <a:prstGeom prst="rect">
+            <a:avLst/>
+          </a:prstGeom>
+          <a:solidFill>
+            <a:srgbClr val="FFFFFF"/>
+          </a:solidFill>
+          <a:ln w="9525">
+            <a:solidFill>
+              <a:srgbClr val="1E7A6F"/>
+            </a:solidFill>
+          </a:ln>
+        </p:spPr>
+        <p:txBody>
+          <a:bodyPr wrap="square" tIns="36576" bIns="36576">
+            <a:spAutoFit/>
+          </a:bodyPr>
+          <a:lstStyle/>
+          <a:p>
+            <a:r>
+              <a:rPr sz="1150" b="1">
+                <a:solidFill>
+                  <a:srgbClr val="1E7A6F"/>
+                </a:solidFill>
+                <a:latin typeface="Calibri"/>
+              </a:rPr>
+              <a:t>Scenario 2 — Parallel Execution</a:t>
+            </a:r>
+          </a:p>
+          <a:p>
+            <a:pPr>
+              <a:spcBef>
+                <a:spcPts val="200"/>
+              </a:spcBef>
+            </a:pPr>
+            <a:r>
+              <a:rPr sz="950" b="1">
+                <a:solidFill>
+                  <a:srgbClr val="262626"/>
+                </a:solidFill>
+                <a:latin typeface="Calibri"/>
+              </a:rPr>
+              <a:t>What it is:  </a:t>
+            </a:r>
+            <a:r>
+              <a:rPr sz="950">
+                <a:solidFill>
+                  <a:srgbClr val="262626"/>
+                </a:solidFill>
+                <a:latin typeface="Calibri"/>
+              </a:rPr>
+              <a:t>As each 4-Stage unit finishes testing, the same unit is converted to a VFD compressor and tested — both programs run concurrently.</a:t>
+            </a:r>
+          </a:p>
+          <a:p>
+            <a:pPr>
+              <a:spcBef>
+                <a:spcPts val="200"/>
+              </a:spcBef>
+            </a:pPr>
+            <a:r>
+              <a:rPr sz="950" b="1">
+                <a:solidFill>
+                  <a:srgbClr val="262626"/>
+                </a:solidFill>
+                <a:latin typeface="Calibri"/>
+              </a:rPr>
+              <a:t>Challenges:  </a:t>
+            </a:r>
+            <a:r>
+              <a:rPr sz="950">
+                <a:solidFill>
+                  <a:srgbClr val="262626"/>
+                </a:solidFill>
+                <a:latin typeface="Calibri"/>
+              </a:rPr>
+              <a:t>VFD/EXV firmware &amp; ultra-high-efficiency component selection needed by Nov 2026; refrigeration team can only work one project at a time; EC conflict (4-Stage MTL EC vs VFD EC release); mechanical team loaded on both projects simultaneously.</a:t>
             </a:r>
           </a:p>
         </p:txBody>

--- a/presentations/VP_Scenario_Comparison.pptx
+++ b/presentations/VP_Scenario_Comparison.pptx
@@ -4715,33 +4715,5654 @@
           </a:p>
         </p:txBody>
       </p:sp>
-      <p:pic>
-        <p:nvPicPr>
-          <p:cNvPr id="3" name="Picture 2" descr="gantt.png"/>
-          <p:cNvPicPr>
-            <a:picLocks noChangeAspect="1"/>
-          </p:cNvPicPr>
-          <p:nvPr/>
-        </p:nvPicPr>
-        <p:blipFill>
-          <a:blip r:embed="rId2"/>
-          <a:stretch>
-            <a:fillRect/>
-          </a:stretch>
-        </p:blipFill>
-        <p:spPr>
-          <a:xfrm>
-            <a:off x="0" y="603504"/>
-            <a:ext cx="12191695" cy="4892682"/>
+      <p:sp>
+        <p:nvSpPr>
+          <p:cNvPr id="3" name="Rectangle 2"/>
+          <p:cNvSpPr/>
+          <p:nvPr/>
+        </p:nvSpPr>
+        <p:spPr>
+          <a:xfrm>
+            <a:off x="1545336" y="932688"/>
+            <a:ext cx="10442448" cy="2176272"/>
           </a:xfrm>
           <a:prstGeom prst="rect">
             <a:avLst/>
           </a:prstGeom>
-        </p:spPr>
-      </p:pic>
-      <p:sp>
-        <p:nvSpPr>
-          <p:cNvPr id="4" name="TextBox 3"/>
+          <a:solidFill>
+            <a:srgbClr val="F0F5FA"/>
+          </a:solidFill>
+          <a:ln>
+            <a:noFill/>
+          </a:ln>
+          <a:effectLst/>
+        </p:spPr>
+        <p:style>
+          <a:lnRef idx="1">
+            <a:schemeClr val="accent1"/>
+          </a:lnRef>
+          <a:fillRef idx="3">
+            <a:schemeClr val="accent1"/>
+          </a:fillRef>
+          <a:effectRef idx="2">
+            <a:schemeClr val="accent1"/>
+          </a:effectRef>
+          <a:fontRef idx="minor">
+            <a:schemeClr val="lt1"/>
+          </a:fontRef>
+        </p:style>
+        <p:txBody>
+          <a:bodyPr rtlCol="0" anchor="ctr"/>
+          <a:lstStyle/>
+          <a:p>
+            <a:pPr algn="ctr"/>
+          </a:p>
+        </p:txBody>
+      </p:sp>
+      <p:sp>
+        <p:nvSpPr>
+          <p:cNvPr id="4" name="Rectangle 3"/>
+          <p:cNvSpPr/>
+          <p:nvPr/>
+        </p:nvSpPr>
+        <p:spPr>
+          <a:xfrm>
+            <a:off x="1545336" y="3108960"/>
+            <a:ext cx="10442448" cy="2148840"/>
+          </a:xfrm>
+          <a:prstGeom prst="rect">
+            <a:avLst/>
+          </a:prstGeom>
+          <a:solidFill>
+            <a:srgbClr val="EEF6F3"/>
+          </a:solidFill>
+          <a:ln>
+            <a:noFill/>
+          </a:ln>
+          <a:effectLst/>
+        </p:spPr>
+        <p:style>
+          <a:lnRef idx="1">
+            <a:schemeClr val="accent1"/>
+          </a:lnRef>
+          <a:fillRef idx="3">
+            <a:schemeClr val="accent1"/>
+          </a:fillRef>
+          <a:effectRef idx="2">
+            <a:schemeClr val="accent1"/>
+          </a:effectRef>
+          <a:fontRef idx="minor">
+            <a:schemeClr val="lt1"/>
+          </a:fontRef>
+        </p:style>
+        <p:txBody>
+          <a:bodyPr rtlCol="0" anchor="ctr"/>
+          <a:lstStyle/>
+          <a:p>
+            <a:pPr algn="ctr"/>
+          </a:p>
+        </p:txBody>
+      </p:sp>
+      <p:cxnSp>
+        <p:nvCxnSpPr>
+          <p:cNvPr id="5" name="Connector 4"/>
+          <p:cNvCxnSpPr/>
+          <p:nvPr/>
+        </p:nvCxnSpPr>
+        <p:spPr>
+          <a:xfrm>
+            <a:off x="1887220" y="932688"/>
+            <a:ext cx="0" cy="4325112"/>
+          </a:xfrm>
+          <a:prstGeom prst="line">
+            <a:avLst/>
+          </a:prstGeom>
+          <a:ln w="9525">
+            <a:solidFill>
+              <a:srgbClr val="E3E7ED"/>
+            </a:solidFill>
+          </a:ln>
+          <a:effectLst/>
+        </p:spPr>
+        <p:style>
+          <a:lnRef idx="2">
+            <a:schemeClr val="accent1"/>
+          </a:lnRef>
+          <a:fillRef idx="0">
+            <a:schemeClr val="accent1"/>
+          </a:fillRef>
+          <a:effectRef idx="1">
+            <a:schemeClr val="accent1"/>
+          </a:effectRef>
+          <a:fontRef idx="minor">
+            <a:schemeClr val="tx1"/>
+          </a:fontRef>
+        </p:style>
+      </p:cxnSp>
+      <p:sp>
+        <p:nvSpPr>
+          <p:cNvPr id="6" name="TextBox 5"/>
+          <p:cNvSpPr txBox="1"/>
+          <p:nvPr/>
+        </p:nvSpPr>
+        <p:spPr>
+          <a:xfrm>
+            <a:off x="1521460" y="5303520"/>
+            <a:ext cx="731520" cy="182880"/>
+          </a:xfrm>
+          <a:prstGeom prst="rect">
+            <a:avLst/>
+          </a:prstGeom>
+          <a:noFill/>
+        </p:spPr>
+        <p:txBody>
+          <a:bodyPr wrap="none" anchor="t" lIns="0" rIns="0" tIns="0" bIns="0">
+            <a:spAutoFit/>
+          </a:bodyPr>
+          <a:lstStyle/>
+          <a:p>
+            <a:pPr algn="ctr"/>
+            <a:r>
+              <a:rPr sz="800" b="0">
+                <a:solidFill>
+                  <a:srgbClr val="5F6672"/>
+                </a:solidFill>
+                <a:latin typeface="Calibri"/>
+              </a:rPr>
+              <a:t>Jul '27</a:t>
+            </a:r>
+          </a:p>
+        </p:txBody>
+      </p:sp>
+      <p:cxnSp>
+        <p:nvCxnSpPr>
+          <p:cNvPr id="7" name="Connector 6"/>
+          <p:cNvCxnSpPr/>
+          <p:nvPr/>
+        </p:nvCxnSpPr>
+        <p:spPr>
+          <a:xfrm>
+            <a:off x="3144640" y="932688"/>
+            <a:ext cx="0" cy="4325112"/>
+          </a:xfrm>
+          <a:prstGeom prst="line">
+            <a:avLst/>
+          </a:prstGeom>
+          <a:ln w="9525">
+            <a:solidFill>
+              <a:srgbClr val="E3E7ED"/>
+            </a:solidFill>
+          </a:ln>
+          <a:effectLst/>
+        </p:spPr>
+        <p:style>
+          <a:lnRef idx="2">
+            <a:schemeClr val="accent1"/>
+          </a:lnRef>
+          <a:fillRef idx="0">
+            <a:schemeClr val="accent1"/>
+          </a:fillRef>
+          <a:effectRef idx="1">
+            <a:schemeClr val="accent1"/>
+          </a:effectRef>
+          <a:fontRef idx="minor">
+            <a:schemeClr val="tx1"/>
+          </a:fontRef>
+        </p:style>
+      </p:cxnSp>
+      <p:sp>
+        <p:nvSpPr>
+          <p:cNvPr id="8" name="TextBox 7"/>
+          <p:cNvSpPr txBox="1"/>
+          <p:nvPr/>
+        </p:nvSpPr>
+        <p:spPr>
+          <a:xfrm>
+            <a:off x="2778880" y="5303520"/>
+            <a:ext cx="731520" cy="182880"/>
+          </a:xfrm>
+          <a:prstGeom prst="rect">
+            <a:avLst/>
+          </a:prstGeom>
+          <a:noFill/>
+        </p:spPr>
+        <p:txBody>
+          <a:bodyPr wrap="none" anchor="t" lIns="0" rIns="0" tIns="0" bIns="0">
+            <a:spAutoFit/>
+          </a:bodyPr>
+          <a:lstStyle/>
+          <a:p>
+            <a:pPr algn="ctr"/>
+            <a:r>
+              <a:rPr sz="800" b="0">
+                <a:solidFill>
+                  <a:srgbClr val="5F6672"/>
+                </a:solidFill>
+                <a:latin typeface="Calibri"/>
+              </a:rPr>
+              <a:t>Oct '27</a:t>
+            </a:r>
+          </a:p>
+        </p:txBody>
+      </p:sp>
+      <p:cxnSp>
+        <p:nvCxnSpPr>
+          <p:cNvPr id="9" name="Connector 8"/>
+          <p:cNvCxnSpPr/>
+          <p:nvPr/>
+        </p:nvCxnSpPr>
+        <p:spPr>
+          <a:xfrm>
+            <a:off x="4402061" y="932688"/>
+            <a:ext cx="0" cy="4325112"/>
+          </a:xfrm>
+          <a:prstGeom prst="line">
+            <a:avLst/>
+          </a:prstGeom>
+          <a:ln w="9525">
+            <a:solidFill>
+              <a:srgbClr val="E3E7ED"/>
+            </a:solidFill>
+          </a:ln>
+          <a:effectLst/>
+        </p:spPr>
+        <p:style>
+          <a:lnRef idx="2">
+            <a:schemeClr val="accent1"/>
+          </a:lnRef>
+          <a:fillRef idx="0">
+            <a:schemeClr val="accent1"/>
+          </a:fillRef>
+          <a:effectRef idx="1">
+            <a:schemeClr val="accent1"/>
+          </a:effectRef>
+          <a:fontRef idx="minor">
+            <a:schemeClr val="tx1"/>
+          </a:fontRef>
+        </p:style>
+      </p:cxnSp>
+      <p:sp>
+        <p:nvSpPr>
+          <p:cNvPr id="10" name="TextBox 9"/>
+          <p:cNvSpPr txBox="1"/>
+          <p:nvPr/>
+        </p:nvSpPr>
+        <p:spPr>
+          <a:xfrm>
+            <a:off x="4036301" y="5303520"/>
+            <a:ext cx="731520" cy="182880"/>
+          </a:xfrm>
+          <a:prstGeom prst="rect">
+            <a:avLst/>
+          </a:prstGeom>
+          <a:noFill/>
+        </p:spPr>
+        <p:txBody>
+          <a:bodyPr wrap="none" anchor="t" lIns="0" rIns="0" tIns="0" bIns="0">
+            <a:spAutoFit/>
+          </a:bodyPr>
+          <a:lstStyle/>
+          <a:p>
+            <a:pPr algn="ctr"/>
+            <a:r>
+              <a:rPr sz="800" b="0">
+                <a:solidFill>
+                  <a:srgbClr val="5F6672"/>
+                </a:solidFill>
+                <a:latin typeface="Calibri"/>
+              </a:rPr>
+              <a:t>Jan '28</a:t>
+            </a:r>
+          </a:p>
+        </p:txBody>
+      </p:sp>
+      <p:cxnSp>
+        <p:nvCxnSpPr>
+          <p:cNvPr id="11" name="Connector 10"/>
+          <p:cNvCxnSpPr/>
+          <p:nvPr/>
+        </p:nvCxnSpPr>
+        <p:spPr>
+          <a:xfrm>
+            <a:off x="5645815" y="932688"/>
+            <a:ext cx="0" cy="4325112"/>
+          </a:xfrm>
+          <a:prstGeom prst="line">
+            <a:avLst/>
+          </a:prstGeom>
+          <a:ln w="9525">
+            <a:solidFill>
+              <a:srgbClr val="E3E7ED"/>
+            </a:solidFill>
+          </a:ln>
+          <a:effectLst/>
+        </p:spPr>
+        <p:style>
+          <a:lnRef idx="2">
+            <a:schemeClr val="accent1"/>
+          </a:lnRef>
+          <a:fillRef idx="0">
+            <a:schemeClr val="accent1"/>
+          </a:fillRef>
+          <a:effectRef idx="1">
+            <a:schemeClr val="accent1"/>
+          </a:effectRef>
+          <a:fontRef idx="minor">
+            <a:schemeClr val="tx1"/>
+          </a:fontRef>
+        </p:style>
+      </p:cxnSp>
+      <p:sp>
+        <p:nvSpPr>
+          <p:cNvPr id="12" name="TextBox 11"/>
+          <p:cNvSpPr txBox="1"/>
+          <p:nvPr/>
+        </p:nvSpPr>
+        <p:spPr>
+          <a:xfrm>
+            <a:off x="5280055" y="5303520"/>
+            <a:ext cx="731520" cy="182880"/>
+          </a:xfrm>
+          <a:prstGeom prst="rect">
+            <a:avLst/>
+          </a:prstGeom>
+          <a:noFill/>
+        </p:spPr>
+        <p:txBody>
+          <a:bodyPr wrap="none" anchor="t" lIns="0" rIns="0" tIns="0" bIns="0">
+            <a:spAutoFit/>
+          </a:bodyPr>
+          <a:lstStyle/>
+          <a:p>
+            <a:pPr algn="ctr"/>
+            <a:r>
+              <a:rPr sz="800" b="0">
+                <a:solidFill>
+                  <a:srgbClr val="5F6672"/>
+                </a:solidFill>
+                <a:latin typeface="Calibri"/>
+              </a:rPr>
+              <a:t>Apr '28</a:t>
+            </a:r>
+          </a:p>
+        </p:txBody>
+      </p:sp>
+      <p:cxnSp>
+        <p:nvCxnSpPr>
+          <p:cNvPr id="13" name="Connector 12"/>
+          <p:cNvCxnSpPr/>
+          <p:nvPr/>
+        </p:nvCxnSpPr>
+        <p:spPr>
+          <a:xfrm>
+            <a:off x="6889568" y="932688"/>
+            <a:ext cx="0" cy="4325112"/>
+          </a:xfrm>
+          <a:prstGeom prst="line">
+            <a:avLst/>
+          </a:prstGeom>
+          <a:ln w="9525">
+            <a:solidFill>
+              <a:srgbClr val="E3E7ED"/>
+            </a:solidFill>
+          </a:ln>
+          <a:effectLst/>
+        </p:spPr>
+        <p:style>
+          <a:lnRef idx="2">
+            <a:schemeClr val="accent1"/>
+          </a:lnRef>
+          <a:fillRef idx="0">
+            <a:schemeClr val="accent1"/>
+          </a:fillRef>
+          <a:effectRef idx="1">
+            <a:schemeClr val="accent1"/>
+          </a:effectRef>
+          <a:fontRef idx="minor">
+            <a:schemeClr val="tx1"/>
+          </a:fontRef>
+        </p:style>
+      </p:cxnSp>
+      <p:sp>
+        <p:nvSpPr>
+          <p:cNvPr id="14" name="TextBox 13"/>
+          <p:cNvSpPr txBox="1"/>
+          <p:nvPr/>
+        </p:nvSpPr>
+        <p:spPr>
+          <a:xfrm>
+            <a:off x="6523808" y="5303520"/>
+            <a:ext cx="731520" cy="182880"/>
+          </a:xfrm>
+          <a:prstGeom prst="rect">
+            <a:avLst/>
+          </a:prstGeom>
+          <a:noFill/>
+        </p:spPr>
+        <p:txBody>
+          <a:bodyPr wrap="none" anchor="t" lIns="0" rIns="0" tIns="0" bIns="0">
+            <a:spAutoFit/>
+          </a:bodyPr>
+          <a:lstStyle/>
+          <a:p>
+            <a:pPr algn="ctr"/>
+            <a:r>
+              <a:rPr sz="800" b="0">
+                <a:solidFill>
+                  <a:srgbClr val="5F6672"/>
+                </a:solidFill>
+                <a:latin typeface="Calibri"/>
+              </a:rPr>
+              <a:t>Jul '28</a:t>
+            </a:r>
+          </a:p>
+        </p:txBody>
+      </p:sp>
+      <p:cxnSp>
+        <p:nvCxnSpPr>
+          <p:cNvPr id="15" name="Connector 14"/>
+          <p:cNvCxnSpPr/>
+          <p:nvPr/>
+        </p:nvCxnSpPr>
+        <p:spPr>
+          <a:xfrm>
+            <a:off x="8146989" y="932688"/>
+            <a:ext cx="0" cy="4325112"/>
+          </a:xfrm>
+          <a:prstGeom prst="line">
+            <a:avLst/>
+          </a:prstGeom>
+          <a:ln w="9525">
+            <a:solidFill>
+              <a:srgbClr val="E3E7ED"/>
+            </a:solidFill>
+          </a:ln>
+          <a:effectLst/>
+        </p:spPr>
+        <p:style>
+          <a:lnRef idx="2">
+            <a:schemeClr val="accent1"/>
+          </a:lnRef>
+          <a:fillRef idx="0">
+            <a:schemeClr val="accent1"/>
+          </a:fillRef>
+          <a:effectRef idx="1">
+            <a:schemeClr val="accent1"/>
+          </a:effectRef>
+          <a:fontRef idx="minor">
+            <a:schemeClr val="tx1"/>
+          </a:fontRef>
+        </p:style>
+      </p:cxnSp>
+      <p:sp>
+        <p:nvSpPr>
+          <p:cNvPr id="16" name="TextBox 15"/>
+          <p:cNvSpPr txBox="1"/>
+          <p:nvPr/>
+        </p:nvSpPr>
+        <p:spPr>
+          <a:xfrm>
+            <a:off x="7781229" y="5303520"/>
+            <a:ext cx="731520" cy="182880"/>
+          </a:xfrm>
+          <a:prstGeom prst="rect">
+            <a:avLst/>
+          </a:prstGeom>
+          <a:noFill/>
+        </p:spPr>
+        <p:txBody>
+          <a:bodyPr wrap="none" anchor="t" lIns="0" rIns="0" tIns="0" bIns="0">
+            <a:spAutoFit/>
+          </a:bodyPr>
+          <a:lstStyle/>
+          <a:p>
+            <a:pPr algn="ctr"/>
+            <a:r>
+              <a:rPr sz="800" b="0">
+                <a:solidFill>
+                  <a:srgbClr val="5F6672"/>
+                </a:solidFill>
+                <a:latin typeface="Calibri"/>
+              </a:rPr>
+              <a:t>Oct '28</a:t>
+            </a:r>
+          </a:p>
+        </p:txBody>
+      </p:sp>
+      <p:cxnSp>
+        <p:nvCxnSpPr>
+          <p:cNvPr id="17" name="Connector 16"/>
+          <p:cNvCxnSpPr/>
+          <p:nvPr/>
+        </p:nvCxnSpPr>
+        <p:spPr>
+          <a:xfrm>
+            <a:off x="9404410" y="932688"/>
+            <a:ext cx="0" cy="4325112"/>
+          </a:xfrm>
+          <a:prstGeom prst="line">
+            <a:avLst/>
+          </a:prstGeom>
+          <a:ln w="9525">
+            <a:solidFill>
+              <a:srgbClr val="E3E7ED"/>
+            </a:solidFill>
+          </a:ln>
+          <a:effectLst/>
+        </p:spPr>
+        <p:style>
+          <a:lnRef idx="2">
+            <a:schemeClr val="accent1"/>
+          </a:lnRef>
+          <a:fillRef idx="0">
+            <a:schemeClr val="accent1"/>
+          </a:fillRef>
+          <a:effectRef idx="1">
+            <a:schemeClr val="accent1"/>
+          </a:effectRef>
+          <a:fontRef idx="minor">
+            <a:schemeClr val="tx1"/>
+          </a:fontRef>
+        </p:style>
+      </p:cxnSp>
+      <p:sp>
+        <p:nvSpPr>
+          <p:cNvPr id="18" name="TextBox 17"/>
+          <p:cNvSpPr txBox="1"/>
+          <p:nvPr/>
+        </p:nvSpPr>
+        <p:spPr>
+          <a:xfrm>
+            <a:off x="9038650" y="5303520"/>
+            <a:ext cx="731520" cy="182880"/>
+          </a:xfrm>
+          <a:prstGeom prst="rect">
+            <a:avLst/>
+          </a:prstGeom>
+          <a:noFill/>
+        </p:spPr>
+        <p:txBody>
+          <a:bodyPr wrap="none" anchor="t" lIns="0" rIns="0" tIns="0" bIns="0">
+            <a:spAutoFit/>
+          </a:bodyPr>
+          <a:lstStyle/>
+          <a:p>
+            <a:pPr algn="ctr"/>
+            <a:r>
+              <a:rPr sz="800" b="0">
+                <a:solidFill>
+                  <a:srgbClr val="5F6672"/>
+                </a:solidFill>
+                <a:latin typeface="Calibri"/>
+              </a:rPr>
+              <a:t>Jan '29</a:t>
+            </a:r>
+          </a:p>
+        </p:txBody>
+      </p:sp>
+      <p:cxnSp>
+        <p:nvCxnSpPr>
+          <p:cNvPr id="19" name="Connector 18"/>
+          <p:cNvCxnSpPr/>
+          <p:nvPr/>
+        </p:nvCxnSpPr>
+        <p:spPr>
+          <a:xfrm>
+            <a:off x="10634496" y="932688"/>
+            <a:ext cx="0" cy="4325112"/>
+          </a:xfrm>
+          <a:prstGeom prst="line">
+            <a:avLst/>
+          </a:prstGeom>
+          <a:ln w="9525">
+            <a:solidFill>
+              <a:srgbClr val="E3E7ED"/>
+            </a:solidFill>
+          </a:ln>
+          <a:effectLst/>
+        </p:spPr>
+        <p:style>
+          <a:lnRef idx="2">
+            <a:schemeClr val="accent1"/>
+          </a:lnRef>
+          <a:fillRef idx="0">
+            <a:schemeClr val="accent1"/>
+          </a:fillRef>
+          <a:effectRef idx="1">
+            <a:schemeClr val="accent1"/>
+          </a:effectRef>
+          <a:fontRef idx="minor">
+            <a:schemeClr val="tx1"/>
+          </a:fontRef>
+        </p:style>
+      </p:cxnSp>
+      <p:sp>
+        <p:nvSpPr>
+          <p:cNvPr id="20" name="TextBox 19"/>
+          <p:cNvSpPr txBox="1"/>
+          <p:nvPr/>
+        </p:nvSpPr>
+        <p:spPr>
+          <a:xfrm>
+            <a:off x="10268736" y="5303520"/>
+            <a:ext cx="731520" cy="182880"/>
+          </a:xfrm>
+          <a:prstGeom prst="rect">
+            <a:avLst/>
+          </a:prstGeom>
+          <a:noFill/>
+        </p:spPr>
+        <p:txBody>
+          <a:bodyPr wrap="none" anchor="t" lIns="0" rIns="0" tIns="0" bIns="0">
+            <a:spAutoFit/>
+          </a:bodyPr>
+          <a:lstStyle/>
+          <a:p>
+            <a:pPr algn="ctr"/>
+            <a:r>
+              <a:rPr sz="800" b="0">
+                <a:solidFill>
+                  <a:srgbClr val="5F6672"/>
+                </a:solidFill>
+                <a:latin typeface="Calibri"/>
+              </a:rPr>
+              <a:t>Apr '29</a:t>
+            </a:r>
+          </a:p>
+        </p:txBody>
+      </p:sp>
+      <p:cxnSp>
+        <p:nvCxnSpPr>
+          <p:cNvPr id="21" name="Connector 20"/>
+          <p:cNvCxnSpPr/>
+          <p:nvPr/>
+        </p:nvCxnSpPr>
+        <p:spPr>
+          <a:xfrm>
+            <a:off x="11878249" y="932688"/>
+            <a:ext cx="0" cy="4325112"/>
+          </a:xfrm>
+          <a:prstGeom prst="line">
+            <a:avLst/>
+          </a:prstGeom>
+          <a:ln w="9525">
+            <a:solidFill>
+              <a:srgbClr val="E3E7ED"/>
+            </a:solidFill>
+          </a:ln>
+          <a:effectLst/>
+        </p:spPr>
+        <p:style>
+          <a:lnRef idx="2">
+            <a:schemeClr val="accent1"/>
+          </a:lnRef>
+          <a:fillRef idx="0">
+            <a:schemeClr val="accent1"/>
+          </a:fillRef>
+          <a:effectRef idx="1">
+            <a:schemeClr val="accent1"/>
+          </a:effectRef>
+          <a:fontRef idx="minor">
+            <a:schemeClr val="tx1"/>
+          </a:fontRef>
+        </p:style>
+      </p:cxnSp>
+      <p:sp>
+        <p:nvSpPr>
+          <p:cNvPr id="22" name="TextBox 21"/>
+          <p:cNvSpPr txBox="1"/>
+          <p:nvPr/>
+        </p:nvSpPr>
+        <p:spPr>
+          <a:xfrm>
+            <a:off x="11512489" y="5303520"/>
+            <a:ext cx="731520" cy="182880"/>
+          </a:xfrm>
+          <a:prstGeom prst="rect">
+            <a:avLst/>
+          </a:prstGeom>
+          <a:noFill/>
+        </p:spPr>
+        <p:txBody>
+          <a:bodyPr wrap="none" anchor="t" lIns="0" rIns="0" tIns="0" bIns="0">
+            <a:spAutoFit/>
+          </a:bodyPr>
+          <a:lstStyle/>
+          <a:p>
+            <a:pPr algn="ctr"/>
+            <a:r>
+              <a:rPr sz="800" b="0">
+                <a:solidFill>
+                  <a:srgbClr val="5F6672"/>
+                </a:solidFill>
+                <a:latin typeface="Calibri"/>
+              </a:rPr>
+              <a:t>Jul '29</a:t>
+            </a:r>
+          </a:p>
+        </p:txBody>
+      </p:sp>
+      <p:cxnSp>
+        <p:nvCxnSpPr>
+          <p:cNvPr id="23" name="Connector 22"/>
+          <p:cNvCxnSpPr/>
+          <p:nvPr/>
+        </p:nvCxnSpPr>
+        <p:spPr>
+          <a:xfrm>
+            <a:off x="1545336" y="5257800"/>
+            <a:ext cx="10442448" cy="0"/>
+          </a:xfrm>
+          <a:prstGeom prst="line">
+            <a:avLst/>
+          </a:prstGeom>
+          <a:ln w="12700">
+            <a:solidFill>
+              <a:srgbClr val="E3E7ED"/>
+            </a:solidFill>
+          </a:ln>
+          <a:effectLst/>
+        </p:spPr>
+        <p:style>
+          <a:lnRef idx="2">
+            <a:schemeClr val="accent1"/>
+          </a:lnRef>
+          <a:fillRef idx="0">
+            <a:schemeClr val="accent1"/>
+          </a:fillRef>
+          <a:effectRef idx="1">
+            <a:schemeClr val="accent1"/>
+          </a:effectRef>
+          <a:fontRef idx="minor">
+            <a:schemeClr val="tx1"/>
+          </a:fontRef>
+        </p:style>
+      </p:cxnSp>
+      <p:sp>
+        <p:nvSpPr>
+          <p:cNvPr id="24" name="TextBox 23"/>
+          <p:cNvSpPr txBox="1"/>
+          <p:nvPr/>
+        </p:nvSpPr>
+        <p:spPr>
+          <a:xfrm>
+            <a:off x="502920" y="1280160"/>
+            <a:ext cx="1024128" cy="548640"/>
+          </a:xfrm>
+          <a:prstGeom prst="rect">
+            <a:avLst/>
+          </a:prstGeom>
+          <a:noFill/>
+        </p:spPr>
+        <p:txBody>
+          <a:bodyPr wrap="none" anchor="ctr" lIns="0" rIns="0" tIns="0" bIns="0">
+            <a:spAutoFit/>
+          </a:bodyPr>
+          <a:lstStyle/>
+          <a:p>
+            <a:pPr algn="r"/>
+            <a:r>
+              <a:rPr sz="850" b="0">
+                <a:solidFill>
+                  <a:srgbClr val="262626"/>
+                </a:solidFill>
+                <a:latin typeface="Calibri"/>
+              </a:rPr>
+              <a:t>4-Stage</a:t>
+            </a:r>
+          </a:p>
+        </p:txBody>
+      </p:sp>
+      <p:sp>
+        <p:nvSpPr>
+          <p:cNvPr id="25" name="TextBox 24"/>
+          <p:cNvSpPr txBox="1"/>
+          <p:nvPr/>
+        </p:nvSpPr>
+        <p:spPr>
+          <a:xfrm>
+            <a:off x="502920" y="2286000"/>
+            <a:ext cx="1024128" cy="548640"/>
+          </a:xfrm>
+          <a:prstGeom prst="rect">
+            <a:avLst/>
+          </a:prstGeom>
+          <a:noFill/>
+        </p:spPr>
+        <p:txBody>
+          <a:bodyPr wrap="none" anchor="ctr" lIns="0" rIns="0" tIns="0" bIns="0">
+            <a:spAutoFit/>
+          </a:bodyPr>
+          <a:lstStyle/>
+          <a:p>
+            <a:pPr algn="r"/>
+            <a:r>
+              <a:rPr sz="850" b="0">
+                <a:solidFill>
+                  <a:srgbClr val="262626"/>
+                </a:solidFill>
+                <a:latin typeface="Calibri"/>
+              </a:rPr>
+              <a:t>VFD</a:t>
+            </a:r>
+          </a:p>
+          <a:p>
+            <a:pPr algn="r"/>
+            <a:r>
+              <a:rPr sz="850" b="0">
+                <a:solidFill>
+                  <a:srgbClr val="262626"/>
+                </a:solidFill>
+                <a:latin typeface="Calibri"/>
+              </a:rPr>
+              <a:t>Compressor</a:t>
+            </a:r>
+          </a:p>
+        </p:txBody>
+      </p:sp>
+      <p:sp>
+        <p:nvSpPr>
+          <p:cNvPr id="26" name="TextBox 25"/>
+          <p:cNvSpPr txBox="1"/>
+          <p:nvPr/>
+        </p:nvSpPr>
+        <p:spPr>
+          <a:xfrm>
+            <a:off x="502920" y="3383280"/>
+            <a:ext cx="1024128" cy="548640"/>
+          </a:xfrm>
+          <a:prstGeom prst="rect">
+            <a:avLst/>
+          </a:prstGeom>
+          <a:noFill/>
+        </p:spPr>
+        <p:txBody>
+          <a:bodyPr wrap="none" anchor="ctr" lIns="0" rIns="0" tIns="0" bIns="0">
+            <a:spAutoFit/>
+          </a:bodyPr>
+          <a:lstStyle/>
+          <a:p>
+            <a:pPr algn="r"/>
+            <a:r>
+              <a:rPr sz="850" b="0">
+                <a:solidFill>
+                  <a:srgbClr val="262626"/>
+                </a:solidFill>
+                <a:latin typeface="Calibri"/>
+              </a:rPr>
+              <a:t>4-Stage</a:t>
+            </a:r>
+          </a:p>
+        </p:txBody>
+      </p:sp>
+      <p:sp>
+        <p:nvSpPr>
+          <p:cNvPr id="27" name="TextBox 26"/>
+          <p:cNvSpPr txBox="1"/>
+          <p:nvPr/>
+        </p:nvSpPr>
+        <p:spPr>
+          <a:xfrm>
+            <a:off x="502920" y="4398264"/>
+            <a:ext cx="1024128" cy="548640"/>
+          </a:xfrm>
+          <a:prstGeom prst="rect">
+            <a:avLst/>
+          </a:prstGeom>
+          <a:noFill/>
+        </p:spPr>
+        <p:txBody>
+          <a:bodyPr wrap="none" anchor="ctr" lIns="0" rIns="0" tIns="0" bIns="0">
+            <a:spAutoFit/>
+          </a:bodyPr>
+          <a:lstStyle/>
+          <a:p>
+            <a:pPr algn="r"/>
+            <a:r>
+              <a:rPr sz="850" b="0">
+                <a:solidFill>
+                  <a:srgbClr val="262626"/>
+                </a:solidFill>
+                <a:latin typeface="Calibri"/>
+              </a:rPr>
+              <a:t>VFD</a:t>
+            </a:r>
+          </a:p>
+          <a:p>
+            <a:pPr algn="r"/>
+            <a:r>
+              <a:rPr sz="850" b="0">
+                <a:solidFill>
+                  <a:srgbClr val="262626"/>
+                </a:solidFill>
+                <a:latin typeface="Calibri"/>
+              </a:rPr>
+              <a:t>Compressor</a:t>
+            </a:r>
+          </a:p>
+        </p:txBody>
+      </p:sp>
+      <p:sp>
+        <p:nvSpPr>
+          <p:cNvPr id="28" name="TextBox 27"/>
+          <p:cNvSpPr txBox="1"/>
+          <p:nvPr/>
+        </p:nvSpPr>
+        <p:spPr>
+          <a:xfrm rot="16200000">
+            <a:off x="-429768" y="1792224"/>
+            <a:ext cx="1463040" cy="457200"/>
+          </a:xfrm>
+          <a:prstGeom prst="rect">
+            <a:avLst/>
+          </a:prstGeom>
+          <a:noFill/>
+        </p:spPr>
+        <p:txBody>
+          <a:bodyPr wrap="none" anchor="ctr" lIns="0" rIns="0" tIns="0" bIns="0">
+            <a:spAutoFit/>
+          </a:bodyPr>
+          <a:lstStyle/>
+          <a:p>
+            <a:pPr algn="ctr"/>
+            <a:r>
+              <a:rPr sz="850" b="1">
+                <a:solidFill>
+                  <a:srgbClr val="2E74B5"/>
+                </a:solidFill>
+                <a:latin typeface="Calibri"/>
+              </a:rPr>
+              <a:t>SCENARIO 1</a:t>
+            </a:r>
+          </a:p>
+          <a:p>
+            <a:pPr algn="ctr"/>
+            <a:r>
+              <a:rPr sz="850" b="1">
+                <a:solidFill>
+                  <a:srgbClr val="2E74B5"/>
+                </a:solidFill>
+                <a:latin typeface="Calibri"/>
+              </a:rPr>
+              <a:t>SEQUENTIAL</a:t>
+            </a:r>
+          </a:p>
+        </p:txBody>
+      </p:sp>
+      <p:sp>
+        <p:nvSpPr>
+          <p:cNvPr id="29" name="TextBox 28"/>
+          <p:cNvSpPr txBox="1"/>
+          <p:nvPr/>
+        </p:nvSpPr>
+        <p:spPr>
+          <a:xfrm rot="16200000">
+            <a:off x="-429768" y="3950208"/>
+            <a:ext cx="1463040" cy="457200"/>
+          </a:xfrm>
+          <a:prstGeom prst="rect">
+            <a:avLst/>
+          </a:prstGeom>
+          <a:noFill/>
+        </p:spPr>
+        <p:txBody>
+          <a:bodyPr wrap="none" anchor="ctr" lIns="0" rIns="0" tIns="0" bIns="0">
+            <a:spAutoFit/>
+          </a:bodyPr>
+          <a:lstStyle/>
+          <a:p>
+            <a:pPr algn="ctr"/>
+            <a:r>
+              <a:rPr sz="850" b="1">
+                <a:solidFill>
+                  <a:srgbClr val="0F8A6C"/>
+                </a:solidFill>
+                <a:latin typeface="Calibri"/>
+              </a:rPr>
+              <a:t>SCENARIO 2</a:t>
+            </a:r>
+          </a:p>
+          <a:p>
+            <a:pPr algn="ctr"/>
+            <a:r>
+              <a:rPr sz="850" b="1">
+                <a:solidFill>
+                  <a:srgbClr val="0F8A6C"/>
+                </a:solidFill>
+                <a:latin typeface="Calibri"/>
+              </a:rPr>
+              <a:t>PARALLEL</a:t>
+            </a:r>
+          </a:p>
+        </p:txBody>
+      </p:sp>
+      <p:sp>
+        <p:nvSpPr>
+          <p:cNvPr id="30" name="Rectangle 29"/>
+          <p:cNvSpPr/>
+          <p:nvPr/>
+        </p:nvSpPr>
+        <p:spPr>
+          <a:xfrm>
+            <a:off x="1600200" y="758952"/>
+            <a:ext cx="292608" cy="68580"/>
+          </a:xfrm>
+          <a:prstGeom prst="rect">
+            <a:avLst/>
+          </a:prstGeom>
+          <a:solidFill>
+            <a:srgbClr val="2E74B5"/>
+          </a:solidFill>
+          <a:ln>
+            <a:noFill/>
+          </a:ln>
+          <a:effectLst/>
+        </p:spPr>
+        <p:style>
+          <a:lnRef idx="1">
+            <a:schemeClr val="accent1"/>
+          </a:lnRef>
+          <a:fillRef idx="3">
+            <a:schemeClr val="accent1"/>
+          </a:fillRef>
+          <a:effectRef idx="2">
+            <a:schemeClr val="accent1"/>
+          </a:effectRef>
+          <a:fontRef idx="minor">
+            <a:schemeClr val="lt1"/>
+          </a:fontRef>
+        </p:style>
+        <p:txBody>
+          <a:bodyPr rtlCol="0" anchor="ctr"/>
+          <a:lstStyle/>
+          <a:p>
+            <a:pPr algn="ctr"/>
+          </a:p>
+        </p:txBody>
+      </p:sp>
+      <p:sp>
+        <p:nvSpPr>
+          <p:cNvPr id="31" name="TextBox 30"/>
+          <p:cNvSpPr txBox="1"/>
+          <p:nvPr/>
+        </p:nvSpPr>
+        <p:spPr>
+          <a:xfrm>
+            <a:off x="1984248" y="694944"/>
+            <a:ext cx="1691640" cy="182880"/>
+          </a:xfrm>
+          <a:prstGeom prst="rect">
+            <a:avLst/>
+          </a:prstGeom>
+          <a:noFill/>
+        </p:spPr>
+        <p:txBody>
+          <a:bodyPr wrap="square" anchor="t" lIns="0" rIns="0" tIns="0" bIns="0">
+            <a:spAutoFit/>
+          </a:bodyPr>
+          <a:lstStyle/>
+          <a:p>
+            <a:pPr algn="l"/>
+            <a:r>
+              <a:rPr sz="850" b="0">
+                <a:solidFill>
+                  <a:srgbClr val="262626"/>
+                </a:solidFill>
+                <a:latin typeface="Calibri"/>
+              </a:rPr>
+              <a:t>Scenario 1 — Sequential</a:t>
+            </a:r>
+          </a:p>
+        </p:txBody>
+      </p:sp>
+      <p:sp>
+        <p:nvSpPr>
+          <p:cNvPr id="32" name="Rectangle 31"/>
+          <p:cNvSpPr/>
+          <p:nvPr/>
+        </p:nvSpPr>
+        <p:spPr>
+          <a:xfrm>
+            <a:off x="3703320" y="758952"/>
+            <a:ext cx="292608" cy="68580"/>
+          </a:xfrm>
+          <a:prstGeom prst="rect">
+            <a:avLst/>
+          </a:prstGeom>
+          <a:solidFill>
+            <a:srgbClr val="0F8A6C"/>
+          </a:solidFill>
+          <a:ln>
+            <a:noFill/>
+          </a:ln>
+          <a:effectLst/>
+        </p:spPr>
+        <p:style>
+          <a:lnRef idx="1">
+            <a:schemeClr val="accent1"/>
+          </a:lnRef>
+          <a:fillRef idx="3">
+            <a:schemeClr val="accent1"/>
+          </a:fillRef>
+          <a:effectRef idx="2">
+            <a:schemeClr val="accent1"/>
+          </a:effectRef>
+          <a:fontRef idx="minor">
+            <a:schemeClr val="lt1"/>
+          </a:fontRef>
+        </p:style>
+        <p:txBody>
+          <a:bodyPr rtlCol="0" anchor="ctr"/>
+          <a:lstStyle/>
+          <a:p>
+            <a:pPr algn="ctr"/>
+          </a:p>
+        </p:txBody>
+      </p:sp>
+      <p:sp>
+        <p:nvSpPr>
+          <p:cNvPr id="33" name="TextBox 32"/>
+          <p:cNvSpPr txBox="1"/>
+          <p:nvPr/>
+        </p:nvSpPr>
+        <p:spPr>
+          <a:xfrm>
+            <a:off x="4087368" y="694944"/>
+            <a:ext cx="1600200" cy="182880"/>
+          </a:xfrm>
+          <a:prstGeom prst="rect">
+            <a:avLst/>
+          </a:prstGeom>
+          <a:noFill/>
+        </p:spPr>
+        <p:txBody>
+          <a:bodyPr wrap="square" anchor="t" lIns="0" rIns="0" tIns="0" bIns="0">
+            <a:spAutoFit/>
+          </a:bodyPr>
+          <a:lstStyle/>
+          <a:p>
+            <a:pPr algn="l"/>
+            <a:r>
+              <a:rPr sz="850" b="0">
+                <a:solidFill>
+                  <a:srgbClr val="262626"/>
+                </a:solidFill>
+                <a:latin typeface="Calibri"/>
+              </a:rPr>
+              <a:t>Scenario 2 — Parallel</a:t>
+            </a:r>
+          </a:p>
+        </p:txBody>
+      </p:sp>
+      <p:sp>
+        <p:nvSpPr>
+          <p:cNvPr id="34" name="Rectangle 33"/>
+          <p:cNvSpPr/>
+          <p:nvPr/>
+        </p:nvSpPr>
+        <p:spPr>
+          <a:xfrm rot="2700000">
+            <a:off x="5728716" y="745236"/>
+            <a:ext cx="91440" cy="91440"/>
+          </a:xfrm>
+          <a:prstGeom prst="rect">
+            <a:avLst/>
+          </a:prstGeom>
+          <a:solidFill>
+            <a:srgbClr val="262626"/>
+          </a:solidFill>
+          <a:ln w="9525">
+            <a:solidFill>
+              <a:srgbClr val="FFFFFF"/>
+            </a:solidFill>
+          </a:ln>
+          <a:effectLst/>
+        </p:spPr>
+        <p:style>
+          <a:lnRef idx="1">
+            <a:schemeClr val="accent1"/>
+          </a:lnRef>
+          <a:fillRef idx="3">
+            <a:schemeClr val="accent1"/>
+          </a:fillRef>
+          <a:effectRef idx="2">
+            <a:schemeClr val="accent1"/>
+          </a:effectRef>
+          <a:fontRef idx="minor">
+            <a:schemeClr val="lt1"/>
+          </a:fontRef>
+        </p:style>
+        <p:txBody>
+          <a:bodyPr rtlCol="0" anchor="ctr"/>
+          <a:lstStyle/>
+          <a:p>
+            <a:pPr algn="ctr"/>
+          </a:p>
+        </p:txBody>
+      </p:sp>
+      <p:sp>
+        <p:nvSpPr>
+          <p:cNvPr id="35" name="TextBox 34"/>
+          <p:cNvSpPr txBox="1"/>
+          <p:nvPr/>
+        </p:nvSpPr>
+        <p:spPr>
+          <a:xfrm>
+            <a:off x="6099048" y="694944"/>
+            <a:ext cx="2057400" cy="182880"/>
+          </a:xfrm>
+          <a:prstGeom prst="rect">
+            <a:avLst/>
+          </a:prstGeom>
+          <a:noFill/>
+        </p:spPr>
+        <p:txBody>
+          <a:bodyPr wrap="square" anchor="t" lIns="0" rIns="0" tIns="0" bIns="0">
+            <a:spAutoFit/>
+          </a:bodyPr>
+          <a:lstStyle/>
+          <a:p>
+            <a:pPr algn="l"/>
+            <a:r>
+              <a:rPr sz="850" b="0">
+                <a:solidFill>
+                  <a:srgbClr val="262626"/>
+                </a:solidFill>
+                <a:latin typeface="Calibri"/>
+              </a:rPr>
+              <a:t>1st Production (larger marker)</a:t>
+            </a:r>
+          </a:p>
+        </p:txBody>
+      </p:sp>
+      <p:sp>
+        <p:nvSpPr>
+          <p:cNvPr id="36" name="Rectangle 35"/>
+          <p:cNvSpPr/>
+          <p:nvPr/>
+        </p:nvSpPr>
+        <p:spPr>
+          <a:xfrm rot="2700000">
+            <a:off x="8106156" y="745236"/>
+            <a:ext cx="91440" cy="91440"/>
+          </a:xfrm>
+          <a:prstGeom prst="rect">
+            <a:avLst/>
+          </a:prstGeom>
+          <a:solidFill>
+            <a:srgbClr val="C00000"/>
+          </a:solidFill>
+          <a:ln w="9525">
+            <a:solidFill>
+              <a:srgbClr val="FFFFFF"/>
+            </a:solidFill>
+          </a:ln>
+          <a:effectLst/>
+        </p:spPr>
+        <p:style>
+          <a:lnRef idx="1">
+            <a:schemeClr val="accent1"/>
+          </a:lnRef>
+          <a:fillRef idx="3">
+            <a:schemeClr val="accent1"/>
+          </a:fillRef>
+          <a:effectRef idx="2">
+            <a:schemeClr val="accent1"/>
+          </a:effectRef>
+          <a:fontRef idx="minor">
+            <a:schemeClr val="lt1"/>
+          </a:fontRef>
+        </p:style>
+        <p:txBody>
+          <a:bodyPr rtlCol="0" anchor="ctr"/>
+          <a:lstStyle/>
+          <a:p>
+            <a:pPr algn="ctr"/>
+          </a:p>
+        </p:txBody>
+      </p:sp>
+      <p:sp>
+        <p:nvSpPr>
+          <p:cNvPr id="37" name="TextBox 36"/>
+          <p:cNvSpPr txBox="1"/>
+          <p:nvPr/>
+        </p:nvSpPr>
+        <p:spPr>
+          <a:xfrm>
+            <a:off x="8476488" y="694944"/>
+            <a:ext cx="3611880" cy="182880"/>
+          </a:xfrm>
+          <a:prstGeom prst="rect">
+            <a:avLst/>
+          </a:prstGeom>
+          <a:noFill/>
+        </p:spPr>
+        <p:txBody>
+          <a:bodyPr wrap="square" anchor="t" lIns="0" rIns="0" tIns="0" bIns="0">
+            <a:spAutoFit/>
+          </a:bodyPr>
+          <a:lstStyle/>
+          <a:p>
+            <a:pPr algn="l"/>
+            <a:r>
+              <a:rPr sz="850" b="0">
+                <a:solidFill>
+                  <a:srgbClr val="262626"/>
+                </a:solidFill>
+                <a:latin typeface="Calibri"/>
+              </a:rPr>
+              <a:t>* EC release team conflict (4-Stage MTL EC vs VFD EC)</a:t>
+            </a:r>
+          </a:p>
+        </p:txBody>
+      </p:sp>
+      <p:sp>
+        <p:nvSpPr>
+          <p:cNvPr id="38" name="Rectangle 37"/>
+          <p:cNvSpPr/>
+          <p:nvPr/>
+        </p:nvSpPr>
+        <p:spPr>
+          <a:xfrm>
+            <a:off x="2096661" y="1520189"/>
+            <a:ext cx="5198509" cy="68580"/>
+          </a:xfrm>
+          <a:prstGeom prst="rect">
+            <a:avLst/>
+          </a:prstGeom>
+          <a:solidFill>
+            <a:srgbClr val="2E74B5"/>
+          </a:solidFill>
+          <a:ln>
+            <a:noFill/>
+          </a:ln>
+          <a:effectLst/>
+        </p:spPr>
+        <p:style>
+          <a:lnRef idx="1">
+            <a:schemeClr val="accent1"/>
+          </a:lnRef>
+          <a:fillRef idx="3">
+            <a:schemeClr val="accent1"/>
+          </a:fillRef>
+          <a:effectRef idx="2">
+            <a:schemeClr val="accent1"/>
+          </a:effectRef>
+          <a:fontRef idx="minor">
+            <a:schemeClr val="lt1"/>
+          </a:fontRef>
+        </p:style>
+        <p:txBody>
+          <a:bodyPr rtlCol="0" anchor="ctr"/>
+          <a:lstStyle/>
+          <a:p>
+            <a:pPr algn="ctr"/>
+          </a:p>
+        </p:txBody>
+      </p:sp>
+      <p:cxnSp>
+        <p:nvCxnSpPr>
+          <p:cNvPr id="39" name="Connector 38"/>
+          <p:cNvCxnSpPr/>
+          <p:nvPr/>
+        </p:nvCxnSpPr>
+        <p:spPr>
+          <a:xfrm flipV="1">
+            <a:off x="2133237" y="1188719"/>
+            <a:ext cx="0" cy="301753"/>
+          </a:xfrm>
+          <a:prstGeom prst="line">
+            <a:avLst/>
+          </a:prstGeom>
+          <a:ln w="6350">
+            <a:solidFill>
+              <a:srgbClr val="B8BFC9"/>
+            </a:solidFill>
+          </a:ln>
+          <a:effectLst/>
+        </p:spPr>
+        <p:style>
+          <a:lnRef idx="2">
+            <a:schemeClr val="accent1"/>
+          </a:lnRef>
+          <a:fillRef idx="0">
+            <a:schemeClr val="accent1"/>
+          </a:fillRef>
+          <a:effectRef idx="1">
+            <a:schemeClr val="accent1"/>
+          </a:effectRef>
+          <a:fontRef idx="minor">
+            <a:schemeClr val="tx1"/>
+          </a:fontRef>
+        </p:style>
+      </p:cxnSp>
+      <p:sp>
+        <p:nvSpPr>
+          <p:cNvPr id="40" name="TextBox 39"/>
+          <p:cNvSpPr txBox="1"/>
+          <p:nvPr/>
+        </p:nvSpPr>
+        <p:spPr>
+          <a:xfrm>
+            <a:off x="1630317" y="896111"/>
+            <a:ext cx="1005840" cy="292608"/>
+          </a:xfrm>
+          <a:prstGeom prst="rect">
+            <a:avLst/>
+          </a:prstGeom>
+          <a:noFill/>
+        </p:spPr>
+        <p:txBody>
+          <a:bodyPr wrap="none" anchor="b" lIns="0" rIns="0" tIns="0" bIns="0">
+            <a:spAutoFit/>
+          </a:bodyPr>
+          <a:lstStyle/>
+          <a:p>
+            <a:pPr algn="ctr"/>
+            <a:r>
+              <a:rPr sz="700" b="0">
+                <a:solidFill>
+                  <a:srgbClr val="5F6672"/>
+                </a:solidFill>
+                <a:latin typeface="Calibri"/>
+              </a:rPr>
+              <a:t>Testing</a:t>
+            </a:r>
+          </a:p>
+          <a:p>
+            <a:pPr algn="ctr"/>
+            <a:r>
+              <a:rPr sz="700" b="0">
+                <a:solidFill>
+                  <a:srgbClr val="5F6672"/>
+                </a:solidFill>
+                <a:latin typeface="Calibri"/>
+              </a:rPr>
+              <a:t>19-Jul-27</a:t>
+            </a:r>
+          </a:p>
+        </p:txBody>
+      </p:sp>
+      <p:cxnSp>
+        <p:nvCxnSpPr>
+          <p:cNvPr id="41" name="Connector 40"/>
+          <p:cNvCxnSpPr/>
+          <p:nvPr/>
+        </p:nvCxnSpPr>
+        <p:spPr>
+          <a:xfrm>
+            <a:off x="3486331" y="1618488"/>
+            <a:ext cx="0" cy="301752"/>
+          </a:xfrm>
+          <a:prstGeom prst="line">
+            <a:avLst/>
+          </a:prstGeom>
+          <a:ln w="6350">
+            <a:solidFill>
+              <a:srgbClr val="B8BFC9"/>
+            </a:solidFill>
+          </a:ln>
+          <a:effectLst/>
+        </p:spPr>
+        <p:style>
+          <a:lnRef idx="2">
+            <a:schemeClr val="accent1"/>
+          </a:lnRef>
+          <a:fillRef idx="0">
+            <a:schemeClr val="accent1"/>
+          </a:fillRef>
+          <a:effectRef idx="1">
+            <a:schemeClr val="accent1"/>
+          </a:effectRef>
+          <a:fontRef idx="minor">
+            <a:schemeClr val="tx1"/>
+          </a:fontRef>
+        </p:style>
+      </p:cxnSp>
+      <p:sp>
+        <p:nvSpPr>
+          <p:cNvPr id="42" name="TextBox 41"/>
+          <p:cNvSpPr txBox="1"/>
+          <p:nvPr/>
+        </p:nvSpPr>
+        <p:spPr>
+          <a:xfrm>
+            <a:off x="2983411" y="1920240"/>
+            <a:ext cx="1005840" cy="292608"/>
+          </a:xfrm>
+          <a:prstGeom prst="rect">
+            <a:avLst/>
+          </a:prstGeom>
+          <a:noFill/>
+        </p:spPr>
+        <p:txBody>
+          <a:bodyPr wrap="none" anchor="t" lIns="0" rIns="0" tIns="0" bIns="0">
+            <a:spAutoFit/>
+          </a:bodyPr>
+          <a:lstStyle/>
+          <a:p>
+            <a:pPr algn="ctr"/>
+            <a:r>
+              <a:rPr sz="700" b="0">
+                <a:solidFill>
+                  <a:srgbClr val="5F6672"/>
+                </a:solidFill>
+                <a:latin typeface="Calibri"/>
+              </a:rPr>
+              <a:t>EC @25</a:t>
+            </a:r>
+          </a:p>
+          <a:p>
+            <a:pPr algn="ctr"/>
+            <a:r>
+              <a:rPr sz="700" b="0">
+                <a:solidFill>
+                  <a:srgbClr val="5F6672"/>
+                </a:solidFill>
+                <a:latin typeface="Calibri"/>
+              </a:rPr>
+              <a:t>26-Oct-27</a:t>
+            </a:r>
+          </a:p>
+        </p:txBody>
+      </p:sp>
+      <p:cxnSp>
+        <p:nvCxnSpPr>
+          <p:cNvPr id="43" name="Connector 42"/>
+          <p:cNvCxnSpPr/>
+          <p:nvPr/>
+        </p:nvCxnSpPr>
+        <p:spPr>
+          <a:xfrm flipV="1">
+            <a:off x="5153780" y="1362456"/>
+            <a:ext cx="0" cy="128016"/>
+          </a:xfrm>
+          <a:prstGeom prst="line">
+            <a:avLst/>
+          </a:prstGeom>
+          <a:ln w="6350">
+            <a:solidFill>
+              <a:srgbClr val="B8BFC9"/>
+            </a:solidFill>
+          </a:ln>
+          <a:effectLst/>
+        </p:spPr>
+        <p:style>
+          <a:lnRef idx="2">
+            <a:schemeClr val="accent1"/>
+          </a:lnRef>
+          <a:fillRef idx="0">
+            <a:schemeClr val="accent1"/>
+          </a:fillRef>
+          <a:effectRef idx="1">
+            <a:schemeClr val="accent1"/>
+          </a:effectRef>
+          <a:fontRef idx="minor">
+            <a:schemeClr val="tx1"/>
+          </a:fontRef>
+        </p:style>
+      </p:cxnSp>
+      <p:sp>
+        <p:nvSpPr>
+          <p:cNvPr id="44" name="TextBox 43"/>
+          <p:cNvSpPr txBox="1"/>
+          <p:nvPr/>
+        </p:nvSpPr>
+        <p:spPr>
+          <a:xfrm>
+            <a:off x="4650860" y="1069848"/>
+            <a:ext cx="1005840" cy="292608"/>
+          </a:xfrm>
+          <a:prstGeom prst="rect">
+            <a:avLst/>
+          </a:prstGeom>
+          <a:noFill/>
+        </p:spPr>
+        <p:txBody>
+          <a:bodyPr wrap="none" anchor="b" lIns="0" rIns="0" tIns="0" bIns="0">
+            <a:spAutoFit/>
+          </a:bodyPr>
+          <a:lstStyle/>
+          <a:p>
+            <a:pPr algn="ctr"/>
+            <a:r>
+              <a:rPr sz="700" b="0">
+                <a:solidFill>
+                  <a:srgbClr val="5F6672"/>
+                </a:solidFill>
+                <a:latin typeface="Calibri"/>
+              </a:rPr>
+              <a:t>SN Deliv.</a:t>
+            </a:r>
+          </a:p>
+          <a:p>
+            <a:pPr algn="ctr"/>
+            <a:r>
+              <a:rPr sz="700" b="0">
+                <a:solidFill>
+                  <a:srgbClr val="5F6672"/>
+                </a:solidFill>
+                <a:latin typeface="Calibri"/>
+              </a:rPr>
+              <a:t>25-Feb-28</a:t>
+            </a:r>
+          </a:p>
+        </p:txBody>
+      </p:sp>
+      <p:cxnSp>
+        <p:nvCxnSpPr>
+          <p:cNvPr id="45" name="Connector 44"/>
+          <p:cNvCxnSpPr/>
+          <p:nvPr/>
+        </p:nvCxnSpPr>
+        <p:spPr>
+          <a:xfrm>
+            <a:off x="5591144" y="1618488"/>
+            <a:ext cx="0" cy="128016"/>
+          </a:xfrm>
+          <a:prstGeom prst="line">
+            <a:avLst/>
+          </a:prstGeom>
+          <a:ln w="6350">
+            <a:solidFill>
+              <a:srgbClr val="B8BFC9"/>
+            </a:solidFill>
+          </a:ln>
+          <a:effectLst/>
+        </p:spPr>
+        <p:style>
+          <a:lnRef idx="2">
+            <a:schemeClr val="accent1"/>
+          </a:lnRef>
+          <a:fillRef idx="0">
+            <a:schemeClr val="accent1"/>
+          </a:fillRef>
+          <a:effectRef idx="1">
+            <a:schemeClr val="accent1"/>
+          </a:effectRef>
+          <a:fontRef idx="minor">
+            <a:schemeClr val="tx1"/>
+          </a:fontRef>
+        </p:style>
+      </p:cxnSp>
+      <p:sp>
+        <p:nvSpPr>
+          <p:cNvPr id="46" name="TextBox 45"/>
+          <p:cNvSpPr txBox="1"/>
+          <p:nvPr/>
+        </p:nvSpPr>
+        <p:spPr>
+          <a:xfrm>
+            <a:off x="5088224" y="1746504"/>
+            <a:ext cx="1005840" cy="292608"/>
+          </a:xfrm>
+          <a:prstGeom prst="rect">
+            <a:avLst/>
+          </a:prstGeom>
+          <a:noFill/>
+        </p:spPr>
+        <p:txBody>
+          <a:bodyPr wrap="none" anchor="t" lIns="0" rIns="0" tIns="0" bIns="0">
+            <a:spAutoFit/>
+          </a:bodyPr>
+          <a:lstStyle/>
+          <a:p>
+            <a:pPr algn="ctr"/>
+            <a:r>
+              <a:rPr sz="700" b="0">
+                <a:solidFill>
+                  <a:srgbClr val="5F6672"/>
+                </a:solidFill>
+                <a:latin typeface="Calibri"/>
+              </a:rPr>
+              <a:t>MTL Build</a:t>
+            </a:r>
+          </a:p>
+          <a:p>
+            <a:pPr algn="ctr"/>
+            <a:r>
+              <a:rPr sz="700" b="0">
+                <a:solidFill>
+                  <a:srgbClr val="5F6672"/>
+                </a:solidFill>
+                <a:latin typeface="Calibri"/>
+              </a:rPr>
+              <a:t>28-Mar-28</a:t>
+            </a:r>
+          </a:p>
+        </p:txBody>
+      </p:sp>
+      <p:cxnSp>
+        <p:nvCxnSpPr>
+          <p:cNvPr id="47" name="Connector 46"/>
+          <p:cNvCxnSpPr/>
+          <p:nvPr/>
+        </p:nvCxnSpPr>
+        <p:spPr>
+          <a:xfrm flipV="1">
+            <a:off x="5727820" y="1188719"/>
+            <a:ext cx="0" cy="301753"/>
+          </a:xfrm>
+          <a:prstGeom prst="line">
+            <a:avLst/>
+          </a:prstGeom>
+          <a:ln w="6350">
+            <a:solidFill>
+              <a:srgbClr val="B8BFC9"/>
+            </a:solidFill>
+          </a:ln>
+          <a:effectLst/>
+        </p:spPr>
+        <p:style>
+          <a:lnRef idx="2">
+            <a:schemeClr val="accent1"/>
+          </a:lnRef>
+          <a:fillRef idx="0">
+            <a:schemeClr val="accent1"/>
+          </a:fillRef>
+          <a:effectRef idx="1">
+            <a:schemeClr val="accent1"/>
+          </a:effectRef>
+          <a:fontRef idx="minor">
+            <a:schemeClr val="tx1"/>
+          </a:fontRef>
+        </p:style>
+      </p:cxnSp>
+      <p:sp>
+        <p:nvSpPr>
+          <p:cNvPr id="48" name="TextBox 47"/>
+          <p:cNvSpPr txBox="1"/>
+          <p:nvPr/>
+        </p:nvSpPr>
+        <p:spPr>
+          <a:xfrm>
+            <a:off x="5224900" y="896111"/>
+            <a:ext cx="1005840" cy="292608"/>
+          </a:xfrm>
+          <a:prstGeom prst="rect">
+            <a:avLst/>
+          </a:prstGeom>
+          <a:noFill/>
+        </p:spPr>
+        <p:txBody>
+          <a:bodyPr wrap="none" anchor="b" lIns="0" rIns="0" tIns="0" bIns="0">
+            <a:spAutoFit/>
+          </a:bodyPr>
+          <a:lstStyle/>
+          <a:p>
+            <a:pPr algn="ctr"/>
+            <a:r>
+              <a:rPr sz="700" b="0">
+                <a:solidFill>
+                  <a:srgbClr val="5F6672"/>
+                </a:solidFill>
+                <a:latin typeface="Calibri"/>
+              </a:rPr>
+              <a:t>SN Release</a:t>
+            </a:r>
+          </a:p>
+          <a:p>
+            <a:pPr algn="ctr"/>
+            <a:r>
+              <a:rPr sz="700" b="0">
+                <a:solidFill>
+                  <a:srgbClr val="5F6672"/>
+                </a:solidFill>
+                <a:latin typeface="Calibri"/>
+              </a:rPr>
+              <a:t>07-Apr-28</a:t>
+            </a:r>
+          </a:p>
+        </p:txBody>
+      </p:sp>
+      <p:cxnSp>
+        <p:nvCxnSpPr>
+          <p:cNvPr id="49" name="Connector 48"/>
+          <p:cNvCxnSpPr/>
+          <p:nvPr/>
+        </p:nvCxnSpPr>
+        <p:spPr>
+          <a:xfrm>
+            <a:off x="5973838" y="1618488"/>
+            <a:ext cx="0" cy="301752"/>
+          </a:xfrm>
+          <a:prstGeom prst="line">
+            <a:avLst/>
+          </a:prstGeom>
+          <a:ln w="6350">
+            <a:solidFill>
+              <a:srgbClr val="B8BFC9"/>
+            </a:solidFill>
+          </a:ln>
+          <a:effectLst/>
+        </p:spPr>
+        <p:style>
+          <a:lnRef idx="2">
+            <a:schemeClr val="accent1"/>
+          </a:lnRef>
+          <a:fillRef idx="0">
+            <a:schemeClr val="accent1"/>
+          </a:fillRef>
+          <a:effectRef idx="1">
+            <a:schemeClr val="accent1"/>
+          </a:effectRef>
+          <a:fontRef idx="minor">
+            <a:schemeClr val="tx1"/>
+          </a:fontRef>
+        </p:style>
+      </p:cxnSp>
+      <p:sp>
+        <p:nvSpPr>
+          <p:cNvPr id="50" name="TextBox 49"/>
+          <p:cNvSpPr txBox="1"/>
+          <p:nvPr/>
+        </p:nvSpPr>
+        <p:spPr>
+          <a:xfrm>
+            <a:off x="5470918" y="1920240"/>
+            <a:ext cx="1005840" cy="292608"/>
+          </a:xfrm>
+          <a:prstGeom prst="rect">
+            <a:avLst/>
+          </a:prstGeom>
+          <a:noFill/>
+        </p:spPr>
+        <p:txBody>
+          <a:bodyPr wrap="none" anchor="t" lIns="0" rIns="0" tIns="0" bIns="0">
+            <a:spAutoFit/>
+          </a:bodyPr>
+          <a:lstStyle/>
+          <a:p>
+            <a:pPr algn="ctr"/>
+            <a:r>
+              <a:rPr sz="700" b="0">
+                <a:solidFill>
+                  <a:srgbClr val="5F6672"/>
+                </a:solidFill>
+                <a:latin typeface="Calibri"/>
+              </a:rPr>
+              <a:t>MTL EC</a:t>
+            </a:r>
+          </a:p>
+          <a:p>
+            <a:pPr algn="ctr"/>
+            <a:r>
+              <a:rPr sz="700" b="0">
+                <a:solidFill>
+                  <a:srgbClr val="5F6672"/>
+                </a:solidFill>
+                <a:latin typeface="Calibri"/>
+              </a:rPr>
+              <a:t>25-Apr-28</a:t>
+            </a:r>
+          </a:p>
+        </p:txBody>
+      </p:sp>
+      <p:cxnSp>
+        <p:nvCxnSpPr>
+          <p:cNvPr id="51" name="Connector 50"/>
+          <p:cNvCxnSpPr/>
+          <p:nvPr/>
+        </p:nvCxnSpPr>
+        <p:spPr>
+          <a:xfrm flipV="1">
+            <a:off x="6452204" y="1362456"/>
+            <a:ext cx="0" cy="128016"/>
+          </a:xfrm>
+          <a:prstGeom prst="line">
+            <a:avLst/>
+          </a:prstGeom>
+          <a:ln w="6350">
+            <a:solidFill>
+              <a:srgbClr val="B8BFC9"/>
+            </a:solidFill>
+          </a:ln>
+          <a:effectLst/>
+        </p:spPr>
+        <p:style>
+          <a:lnRef idx="2">
+            <a:schemeClr val="accent1"/>
+          </a:lnRef>
+          <a:fillRef idx="0">
+            <a:schemeClr val="accent1"/>
+          </a:fillRef>
+          <a:effectRef idx="1">
+            <a:schemeClr val="accent1"/>
+          </a:effectRef>
+          <a:fontRef idx="minor">
+            <a:schemeClr val="tx1"/>
+          </a:fontRef>
+        </p:style>
+      </p:cxnSp>
+      <p:sp>
+        <p:nvSpPr>
+          <p:cNvPr id="52" name="TextBox 51"/>
+          <p:cNvSpPr txBox="1"/>
+          <p:nvPr/>
+        </p:nvSpPr>
+        <p:spPr>
+          <a:xfrm>
+            <a:off x="5949284" y="1069848"/>
+            <a:ext cx="1005840" cy="292608"/>
+          </a:xfrm>
+          <a:prstGeom prst="rect">
+            <a:avLst/>
+          </a:prstGeom>
+          <a:noFill/>
+        </p:spPr>
+        <p:txBody>
+          <a:bodyPr wrap="none" anchor="b" lIns="0" rIns="0" tIns="0" bIns="0">
+            <a:spAutoFit/>
+          </a:bodyPr>
+          <a:lstStyle/>
+          <a:p>
+            <a:pPr algn="ctr"/>
+            <a:r>
+              <a:rPr sz="700" b="0">
+                <a:solidFill>
+                  <a:srgbClr val="5F6672"/>
+                </a:solidFill>
+                <a:latin typeface="Calibri"/>
+              </a:rPr>
+              <a:t>Agency</a:t>
+            </a:r>
+          </a:p>
+          <a:p>
+            <a:pPr algn="ctr"/>
+            <a:r>
+              <a:rPr sz="700" b="0">
+                <a:solidFill>
+                  <a:srgbClr val="5F6672"/>
+                </a:solidFill>
+                <a:latin typeface="Calibri"/>
+              </a:rPr>
+              <a:t>30-May-28</a:t>
+            </a:r>
+          </a:p>
+        </p:txBody>
+      </p:sp>
+      <p:cxnSp>
+        <p:nvCxnSpPr>
+          <p:cNvPr id="53" name="Connector 52"/>
+          <p:cNvCxnSpPr/>
+          <p:nvPr/>
+        </p:nvCxnSpPr>
+        <p:spPr>
+          <a:xfrm>
+            <a:off x="7258594" y="1618488"/>
+            <a:ext cx="0" cy="128016"/>
+          </a:xfrm>
+          <a:prstGeom prst="line">
+            <a:avLst/>
+          </a:prstGeom>
+          <a:ln w="6350">
+            <a:solidFill>
+              <a:srgbClr val="B8BFC9"/>
+            </a:solidFill>
+          </a:ln>
+          <a:effectLst/>
+        </p:spPr>
+        <p:style>
+          <a:lnRef idx="2">
+            <a:schemeClr val="accent1"/>
+          </a:lnRef>
+          <a:fillRef idx="0">
+            <a:schemeClr val="accent1"/>
+          </a:fillRef>
+          <a:effectRef idx="1">
+            <a:schemeClr val="accent1"/>
+          </a:effectRef>
+          <a:fontRef idx="minor">
+            <a:schemeClr val="tx1"/>
+          </a:fontRef>
+        </p:style>
+      </p:cxnSp>
+      <p:sp>
+        <p:nvSpPr>
+          <p:cNvPr id="54" name="TextBox 53"/>
+          <p:cNvSpPr txBox="1"/>
+          <p:nvPr/>
+        </p:nvSpPr>
+        <p:spPr>
+          <a:xfrm>
+            <a:off x="6755674" y="1746504"/>
+            <a:ext cx="1005840" cy="292608"/>
+          </a:xfrm>
+          <a:prstGeom prst="rect">
+            <a:avLst/>
+          </a:prstGeom>
+          <a:noFill/>
+        </p:spPr>
+        <p:txBody>
+          <a:bodyPr wrap="none" anchor="t" lIns="0" rIns="0" tIns="0" bIns="0">
+            <a:spAutoFit/>
+          </a:bodyPr>
+          <a:lstStyle/>
+          <a:p>
+            <a:pPr algn="ctr"/>
+            <a:r>
+              <a:rPr sz="750" b="1">
+                <a:solidFill>
+                  <a:srgbClr val="262626"/>
+                </a:solidFill>
+                <a:latin typeface="Calibri"/>
+              </a:rPr>
+              <a:t>1st Prod</a:t>
+            </a:r>
+          </a:p>
+          <a:p>
+            <a:pPr algn="ctr"/>
+            <a:r>
+              <a:rPr sz="750" b="1">
+                <a:solidFill>
+                  <a:srgbClr val="262626"/>
+                </a:solidFill>
+                <a:latin typeface="Calibri"/>
+              </a:rPr>
+              <a:t>28-Jul-28</a:t>
+            </a:r>
+          </a:p>
+        </p:txBody>
+      </p:sp>
+      <p:sp>
+        <p:nvSpPr>
+          <p:cNvPr id="55" name="Rectangle 54"/>
+          <p:cNvSpPr/>
+          <p:nvPr/>
+        </p:nvSpPr>
+        <p:spPr>
+          <a:xfrm rot="2700000">
+            <a:off x="2094436" y="1515679"/>
+            <a:ext cx="77601" cy="77601"/>
+          </a:xfrm>
+          <a:prstGeom prst="rect">
+            <a:avLst/>
+          </a:prstGeom>
+          <a:solidFill>
+            <a:srgbClr val="2E74B5"/>
+          </a:solidFill>
+          <a:ln w="12700">
+            <a:solidFill>
+              <a:srgbClr val="FFFFFF"/>
+            </a:solidFill>
+          </a:ln>
+          <a:effectLst/>
+        </p:spPr>
+        <p:style>
+          <a:lnRef idx="1">
+            <a:schemeClr val="accent1"/>
+          </a:lnRef>
+          <a:fillRef idx="3">
+            <a:schemeClr val="accent1"/>
+          </a:fillRef>
+          <a:effectRef idx="2">
+            <a:schemeClr val="accent1"/>
+          </a:effectRef>
+          <a:fontRef idx="minor">
+            <a:schemeClr val="lt1"/>
+          </a:fontRef>
+        </p:style>
+        <p:txBody>
+          <a:bodyPr rtlCol="0" anchor="ctr"/>
+          <a:lstStyle/>
+          <a:p>
+            <a:pPr algn="ctr"/>
+          </a:p>
+        </p:txBody>
+      </p:sp>
+      <p:sp>
+        <p:nvSpPr>
+          <p:cNvPr id="56" name="Rectangle 55"/>
+          <p:cNvSpPr/>
+          <p:nvPr/>
+        </p:nvSpPr>
+        <p:spPr>
+          <a:xfrm rot="2700000">
+            <a:off x="3447530" y="1515679"/>
+            <a:ext cx="77601" cy="77601"/>
+          </a:xfrm>
+          <a:prstGeom prst="rect">
+            <a:avLst/>
+          </a:prstGeom>
+          <a:solidFill>
+            <a:srgbClr val="2E74B5"/>
+          </a:solidFill>
+          <a:ln w="12700">
+            <a:solidFill>
+              <a:srgbClr val="FFFFFF"/>
+            </a:solidFill>
+          </a:ln>
+          <a:effectLst/>
+        </p:spPr>
+        <p:style>
+          <a:lnRef idx="1">
+            <a:schemeClr val="accent1"/>
+          </a:lnRef>
+          <a:fillRef idx="3">
+            <a:schemeClr val="accent1"/>
+          </a:fillRef>
+          <a:effectRef idx="2">
+            <a:schemeClr val="accent1"/>
+          </a:effectRef>
+          <a:fontRef idx="minor">
+            <a:schemeClr val="lt1"/>
+          </a:fontRef>
+        </p:style>
+        <p:txBody>
+          <a:bodyPr rtlCol="0" anchor="ctr"/>
+          <a:lstStyle/>
+          <a:p>
+            <a:pPr algn="ctr"/>
+          </a:p>
+        </p:txBody>
+      </p:sp>
+      <p:sp>
+        <p:nvSpPr>
+          <p:cNvPr id="57" name="Rectangle 56"/>
+          <p:cNvSpPr/>
+          <p:nvPr/>
+        </p:nvSpPr>
+        <p:spPr>
+          <a:xfrm rot="2700000">
+            <a:off x="5114980" y="1515679"/>
+            <a:ext cx="77601" cy="77601"/>
+          </a:xfrm>
+          <a:prstGeom prst="rect">
+            <a:avLst/>
+          </a:prstGeom>
+          <a:solidFill>
+            <a:srgbClr val="2E74B5"/>
+          </a:solidFill>
+          <a:ln w="12700">
+            <a:solidFill>
+              <a:srgbClr val="FFFFFF"/>
+            </a:solidFill>
+          </a:ln>
+          <a:effectLst/>
+        </p:spPr>
+        <p:style>
+          <a:lnRef idx="1">
+            <a:schemeClr val="accent1"/>
+          </a:lnRef>
+          <a:fillRef idx="3">
+            <a:schemeClr val="accent1"/>
+          </a:fillRef>
+          <a:effectRef idx="2">
+            <a:schemeClr val="accent1"/>
+          </a:effectRef>
+          <a:fontRef idx="minor">
+            <a:schemeClr val="lt1"/>
+          </a:fontRef>
+        </p:style>
+        <p:txBody>
+          <a:bodyPr rtlCol="0" anchor="ctr"/>
+          <a:lstStyle/>
+          <a:p>
+            <a:pPr algn="ctr"/>
+          </a:p>
+        </p:txBody>
+      </p:sp>
+      <p:sp>
+        <p:nvSpPr>
+          <p:cNvPr id="58" name="Rectangle 57"/>
+          <p:cNvSpPr/>
+          <p:nvPr/>
+        </p:nvSpPr>
+        <p:spPr>
+          <a:xfrm rot="2700000">
+            <a:off x="5552344" y="1515679"/>
+            <a:ext cx="77601" cy="77601"/>
+          </a:xfrm>
+          <a:prstGeom prst="rect">
+            <a:avLst/>
+          </a:prstGeom>
+          <a:solidFill>
+            <a:srgbClr val="2E74B5"/>
+          </a:solidFill>
+          <a:ln w="12700">
+            <a:solidFill>
+              <a:srgbClr val="FFFFFF"/>
+            </a:solidFill>
+          </a:ln>
+          <a:effectLst/>
+        </p:spPr>
+        <p:style>
+          <a:lnRef idx="1">
+            <a:schemeClr val="accent1"/>
+          </a:lnRef>
+          <a:fillRef idx="3">
+            <a:schemeClr val="accent1"/>
+          </a:fillRef>
+          <a:effectRef idx="2">
+            <a:schemeClr val="accent1"/>
+          </a:effectRef>
+          <a:fontRef idx="minor">
+            <a:schemeClr val="lt1"/>
+          </a:fontRef>
+        </p:style>
+        <p:txBody>
+          <a:bodyPr rtlCol="0" anchor="ctr"/>
+          <a:lstStyle/>
+          <a:p>
+            <a:pPr algn="ctr"/>
+          </a:p>
+        </p:txBody>
+      </p:sp>
+      <p:sp>
+        <p:nvSpPr>
+          <p:cNvPr id="59" name="Rectangle 58"/>
+          <p:cNvSpPr/>
+          <p:nvPr/>
+        </p:nvSpPr>
+        <p:spPr>
+          <a:xfrm rot="2700000">
+            <a:off x="5689020" y="1515679"/>
+            <a:ext cx="77601" cy="77601"/>
+          </a:xfrm>
+          <a:prstGeom prst="rect">
+            <a:avLst/>
+          </a:prstGeom>
+          <a:solidFill>
+            <a:srgbClr val="2E74B5"/>
+          </a:solidFill>
+          <a:ln w="12700">
+            <a:solidFill>
+              <a:srgbClr val="FFFFFF"/>
+            </a:solidFill>
+          </a:ln>
+          <a:effectLst/>
+        </p:spPr>
+        <p:style>
+          <a:lnRef idx="1">
+            <a:schemeClr val="accent1"/>
+          </a:lnRef>
+          <a:fillRef idx="3">
+            <a:schemeClr val="accent1"/>
+          </a:fillRef>
+          <a:effectRef idx="2">
+            <a:schemeClr val="accent1"/>
+          </a:effectRef>
+          <a:fontRef idx="minor">
+            <a:schemeClr val="lt1"/>
+          </a:fontRef>
+        </p:style>
+        <p:txBody>
+          <a:bodyPr rtlCol="0" anchor="ctr"/>
+          <a:lstStyle/>
+          <a:p>
+            <a:pPr algn="ctr"/>
+          </a:p>
+        </p:txBody>
+      </p:sp>
+      <p:sp>
+        <p:nvSpPr>
+          <p:cNvPr id="60" name="Rectangle 59"/>
+          <p:cNvSpPr/>
+          <p:nvPr/>
+        </p:nvSpPr>
+        <p:spPr>
+          <a:xfrm rot="2700000">
+            <a:off x="5935037" y="1515679"/>
+            <a:ext cx="77601" cy="77601"/>
+          </a:xfrm>
+          <a:prstGeom prst="rect">
+            <a:avLst/>
+          </a:prstGeom>
+          <a:solidFill>
+            <a:srgbClr val="2E74B5"/>
+          </a:solidFill>
+          <a:ln w="12700">
+            <a:solidFill>
+              <a:srgbClr val="FFFFFF"/>
+            </a:solidFill>
+          </a:ln>
+          <a:effectLst/>
+        </p:spPr>
+        <p:style>
+          <a:lnRef idx="1">
+            <a:schemeClr val="accent1"/>
+          </a:lnRef>
+          <a:fillRef idx="3">
+            <a:schemeClr val="accent1"/>
+          </a:fillRef>
+          <a:effectRef idx="2">
+            <a:schemeClr val="accent1"/>
+          </a:effectRef>
+          <a:fontRef idx="minor">
+            <a:schemeClr val="lt1"/>
+          </a:fontRef>
+        </p:style>
+        <p:txBody>
+          <a:bodyPr rtlCol="0" anchor="ctr"/>
+          <a:lstStyle/>
+          <a:p>
+            <a:pPr algn="ctr"/>
+          </a:p>
+        </p:txBody>
+      </p:sp>
+      <p:sp>
+        <p:nvSpPr>
+          <p:cNvPr id="61" name="Rectangle 60"/>
+          <p:cNvSpPr/>
+          <p:nvPr/>
+        </p:nvSpPr>
+        <p:spPr>
+          <a:xfrm rot="2700000">
+            <a:off x="6413404" y="1515679"/>
+            <a:ext cx="77601" cy="77601"/>
+          </a:xfrm>
+          <a:prstGeom prst="rect">
+            <a:avLst/>
+          </a:prstGeom>
+          <a:solidFill>
+            <a:srgbClr val="2E74B5"/>
+          </a:solidFill>
+          <a:ln w="12700">
+            <a:solidFill>
+              <a:srgbClr val="FFFFFF"/>
+            </a:solidFill>
+          </a:ln>
+          <a:effectLst/>
+        </p:spPr>
+        <p:style>
+          <a:lnRef idx="1">
+            <a:schemeClr val="accent1"/>
+          </a:lnRef>
+          <a:fillRef idx="3">
+            <a:schemeClr val="accent1"/>
+          </a:fillRef>
+          <a:effectRef idx="2">
+            <a:schemeClr val="accent1"/>
+          </a:effectRef>
+          <a:fontRef idx="minor">
+            <a:schemeClr val="lt1"/>
+          </a:fontRef>
+        </p:style>
+        <p:txBody>
+          <a:bodyPr rtlCol="0" anchor="ctr"/>
+          <a:lstStyle/>
+          <a:p>
+            <a:pPr algn="ctr"/>
+          </a:p>
+        </p:txBody>
+      </p:sp>
+      <p:sp>
+        <p:nvSpPr>
+          <p:cNvPr id="62" name="Rectangle 61"/>
+          <p:cNvSpPr/>
+          <p:nvPr/>
+        </p:nvSpPr>
+        <p:spPr>
+          <a:xfrm rot="2700000">
+            <a:off x="7203626" y="1499512"/>
+            <a:ext cx="109934" cy="109934"/>
+          </a:xfrm>
+          <a:prstGeom prst="rect">
+            <a:avLst/>
+          </a:prstGeom>
+          <a:solidFill>
+            <a:srgbClr val="2E74B5"/>
+          </a:solidFill>
+          <a:ln w="12700">
+            <a:solidFill>
+              <a:srgbClr val="FFFFFF"/>
+            </a:solidFill>
+          </a:ln>
+          <a:effectLst/>
+        </p:spPr>
+        <p:style>
+          <a:lnRef idx="1">
+            <a:schemeClr val="accent1"/>
+          </a:lnRef>
+          <a:fillRef idx="3">
+            <a:schemeClr val="accent1"/>
+          </a:fillRef>
+          <a:effectRef idx="2">
+            <a:schemeClr val="accent1"/>
+          </a:effectRef>
+          <a:fontRef idx="minor">
+            <a:schemeClr val="lt1"/>
+          </a:fontRef>
+        </p:style>
+        <p:txBody>
+          <a:bodyPr rtlCol="0" anchor="ctr"/>
+          <a:lstStyle/>
+          <a:p>
+            <a:pPr algn="ctr"/>
+          </a:p>
+        </p:txBody>
+      </p:sp>
+      <p:sp>
+        <p:nvSpPr>
+          <p:cNvPr id="63" name="Rectangle 62"/>
+          <p:cNvSpPr/>
+          <p:nvPr/>
+        </p:nvSpPr>
+        <p:spPr>
+          <a:xfrm>
+            <a:off x="5937262" y="2526029"/>
+            <a:ext cx="5253179" cy="68580"/>
+          </a:xfrm>
+          <a:prstGeom prst="rect">
+            <a:avLst/>
+          </a:prstGeom>
+          <a:solidFill>
+            <a:srgbClr val="2E74B5"/>
+          </a:solidFill>
+          <a:ln>
+            <a:noFill/>
+          </a:ln>
+          <a:effectLst/>
+        </p:spPr>
+        <p:style>
+          <a:lnRef idx="1">
+            <a:schemeClr val="accent1"/>
+          </a:lnRef>
+          <a:fillRef idx="3">
+            <a:schemeClr val="accent1"/>
+          </a:fillRef>
+          <a:effectRef idx="2">
+            <a:schemeClr val="accent1"/>
+          </a:effectRef>
+          <a:fontRef idx="minor">
+            <a:schemeClr val="lt1"/>
+          </a:fontRef>
+        </p:style>
+        <p:txBody>
+          <a:bodyPr rtlCol="0" anchor="ctr"/>
+          <a:lstStyle/>
+          <a:p>
+            <a:pPr algn="ctr"/>
+          </a:p>
+        </p:txBody>
+      </p:sp>
+      <p:cxnSp>
+        <p:nvCxnSpPr>
+          <p:cNvPr id="64" name="Connector 63"/>
+          <p:cNvCxnSpPr/>
+          <p:nvPr/>
+        </p:nvCxnSpPr>
+        <p:spPr>
+          <a:xfrm flipV="1">
+            <a:off x="5973838" y="2368296"/>
+            <a:ext cx="0" cy="128016"/>
+          </a:xfrm>
+          <a:prstGeom prst="line">
+            <a:avLst/>
+          </a:prstGeom>
+          <a:ln w="6350">
+            <a:solidFill>
+              <a:srgbClr val="B8BFC9"/>
+            </a:solidFill>
+          </a:ln>
+          <a:effectLst/>
+        </p:spPr>
+        <p:style>
+          <a:lnRef idx="2">
+            <a:schemeClr val="accent1"/>
+          </a:lnRef>
+          <a:fillRef idx="0">
+            <a:schemeClr val="accent1"/>
+          </a:fillRef>
+          <a:effectRef idx="1">
+            <a:schemeClr val="accent1"/>
+          </a:effectRef>
+          <a:fontRef idx="minor">
+            <a:schemeClr val="tx1"/>
+          </a:fontRef>
+        </p:style>
+      </p:cxnSp>
+      <p:sp>
+        <p:nvSpPr>
+          <p:cNvPr id="65" name="TextBox 64"/>
+          <p:cNvSpPr txBox="1"/>
+          <p:nvPr/>
+        </p:nvSpPr>
+        <p:spPr>
+          <a:xfrm>
+            <a:off x="5470918" y="2075688"/>
+            <a:ext cx="1005840" cy="292608"/>
+          </a:xfrm>
+          <a:prstGeom prst="rect">
+            <a:avLst/>
+          </a:prstGeom>
+          <a:noFill/>
+        </p:spPr>
+        <p:txBody>
+          <a:bodyPr wrap="none" anchor="b" lIns="0" rIns="0" tIns="0" bIns="0">
+            <a:spAutoFit/>
+          </a:bodyPr>
+          <a:lstStyle/>
+          <a:p>
+            <a:pPr algn="ctr"/>
+            <a:r>
+              <a:rPr sz="700" b="0">
+                <a:solidFill>
+                  <a:srgbClr val="5F6672"/>
+                </a:solidFill>
+                <a:latin typeface="Calibri"/>
+              </a:rPr>
+              <a:t>Testing</a:t>
+            </a:r>
+          </a:p>
+          <a:p>
+            <a:pPr algn="ctr"/>
+            <a:r>
+              <a:rPr sz="700" b="0">
+                <a:solidFill>
+                  <a:srgbClr val="5F6672"/>
+                </a:solidFill>
+                <a:latin typeface="Calibri"/>
+              </a:rPr>
+              <a:t>25-Apr-28</a:t>
+            </a:r>
+          </a:p>
+        </p:txBody>
+      </p:sp>
+      <p:cxnSp>
+        <p:nvCxnSpPr>
+          <p:cNvPr id="66" name="Connector 65"/>
+          <p:cNvCxnSpPr/>
+          <p:nvPr/>
+        </p:nvCxnSpPr>
+        <p:spPr>
+          <a:xfrm>
+            <a:off x="8201660" y="2624327"/>
+            <a:ext cx="0" cy="301752"/>
+          </a:xfrm>
+          <a:prstGeom prst="line">
+            <a:avLst/>
+          </a:prstGeom>
+          <a:ln w="6350">
+            <a:solidFill>
+              <a:srgbClr val="B8BFC9"/>
+            </a:solidFill>
+          </a:ln>
+          <a:effectLst/>
+        </p:spPr>
+        <p:style>
+          <a:lnRef idx="2">
+            <a:schemeClr val="accent1"/>
+          </a:lnRef>
+          <a:fillRef idx="0">
+            <a:schemeClr val="accent1"/>
+          </a:fillRef>
+          <a:effectRef idx="1">
+            <a:schemeClr val="accent1"/>
+          </a:effectRef>
+          <a:fontRef idx="minor">
+            <a:schemeClr val="tx1"/>
+          </a:fontRef>
+        </p:style>
+      </p:cxnSp>
+      <p:sp>
+        <p:nvSpPr>
+          <p:cNvPr id="67" name="TextBox 66"/>
+          <p:cNvSpPr txBox="1"/>
+          <p:nvPr/>
+        </p:nvSpPr>
+        <p:spPr>
+          <a:xfrm>
+            <a:off x="7698740" y="2926079"/>
+            <a:ext cx="1005840" cy="292608"/>
+          </a:xfrm>
+          <a:prstGeom prst="rect">
+            <a:avLst/>
+          </a:prstGeom>
+          <a:noFill/>
+        </p:spPr>
+        <p:txBody>
+          <a:bodyPr wrap="none" anchor="t" lIns="0" rIns="0" tIns="0" bIns="0">
+            <a:spAutoFit/>
+          </a:bodyPr>
+          <a:lstStyle/>
+          <a:p>
+            <a:pPr algn="ctr"/>
+            <a:r>
+              <a:rPr sz="700" b="0">
+                <a:solidFill>
+                  <a:srgbClr val="5F6672"/>
+                </a:solidFill>
+                <a:latin typeface="Calibri"/>
+              </a:rPr>
+              <a:t>EC @25</a:t>
+            </a:r>
+          </a:p>
+          <a:p>
+            <a:pPr algn="ctr"/>
+            <a:r>
+              <a:rPr sz="700" b="0">
+                <a:solidFill>
+                  <a:srgbClr val="5F6672"/>
+                </a:solidFill>
+                <a:latin typeface="Calibri"/>
+              </a:rPr>
+              <a:t>05-Oct-28</a:t>
+            </a:r>
+          </a:p>
+        </p:txBody>
+      </p:sp>
+      <p:cxnSp>
+        <p:nvCxnSpPr>
+          <p:cNvPr id="68" name="Connector 67"/>
+          <p:cNvCxnSpPr/>
+          <p:nvPr/>
+        </p:nvCxnSpPr>
+        <p:spPr>
+          <a:xfrm flipV="1">
+            <a:off x="9404410" y="2194560"/>
+            <a:ext cx="0" cy="301752"/>
+          </a:xfrm>
+          <a:prstGeom prst="line">
+            <a:avLst/>
+          </a:prstGeom>
+          <a:ln w="6350">
+            <a:solidFill>
+              <a:srgbClr val="B8BFC9"/>
+            </a:solidFill>
+          </a:ln>
+          <a:effectLst/>
+        </p:spPr>
+        <p:style>
+          <a:lnRef idx="2">
+            <a:schemeClr val="accent1"/>
+          </a:lnRef>
+          <a:fillRef idx="0">
+            <a:schemeClr val="accent1"/>
+          </a:fillRef>
+          <a:effectRef idx="1">
+            <a:schemeClr val="accent1"/>
+          </a:effectRef>
+          <a:fontRef idx="minor">
+            <a:schemeClr val="tx1"/>
+          </a:fontRef>
+        </p:style>
+      </p:cxnSp>
+      <p:sp>
+        <p:nvSpPr>
+          <p:cNvPr id="69" name="TextBox 68"/>
+          <p:cNvSpPr txBox="1"/>
+          <p:nvPr/>
+        </p:nvSpPr>
+        <p:spPr>
+          <a:xfrm>
+            <a:off x="8901490" y="1901952"/>
+            <a:ext cx="1005840" cy="292608"/>
+          </a:xfrm>
+          <a:prstGeom prst="rect">
+            <a:avLst/>
+          </a:prstGeom>
+          <a:noFill/>
+        </p:spPr>
+        <p:txBody>
+          <a:bodyPr wrap="none" anchor="b" lIns="0" rIns="0" tIns="0" bIns="0">
+            <a:spAutoFit/>
+          </a:bodyPr>
+          <a:lstStyle/>
+          <a:p>
+            <a:pPr algn="ctr"/>
+            <a:r>
+              <a:rPr sz="700" b="0">
+                <a:solidFill>
+                  <a:srgbClr val="5F6672"/>
+                </a:solidFill>
+                <a:latin typeface="Calibri"/>
+              </a:rPr>
+              <a:t>SN Deliv.</a:t>
+            </a:r>
+          </a:p>
+          <a:p>
+            <a:pPr algn="ctr"/>
+            <a:r>
+              <a:rPr sz="700" b="0">
+                <a:solidFill>
+                  <a:srgbClr val="5F6672"/>
+                </a:solidFill>
+                <a:latin typeface="Calibri"/>
+              </a:rPr>
+              <a:t>01-Jan-29</a:t>
+            </a:r>
+          </a:p>
+        </p:txBody>
+      </p:sp>
+      <p:cxnSp>
+        <p:nvCxnSpPr>
+          <p:cNvPr id="70" name="Connector 69"/>
+          <p:cNvCxnSpPr/>
+          <p:nvPr/>
+        </p:nvCxnSpPr>
+        <p:spPr>
+          <a:xfrm>
+            <a:off x="9814439" y="2624327"/>
+            <a:ext cx="0" cy="128017"/>
+          </a:xfrm>
+          <a:prstGeom prst="line">
+            <a:avLst/>
+          </a:prstGeom>
+          <a:ln w="6350">
+            <a:solidFill>
+              <a:srgbClr val="B8BFC9"/>
+            </a:solidFill>
+          </a:ln>
+          <a:effectLst/>
+        </p:spPr>
+        <p:style>
+          <a:lnRef idx="2">
+            <a:schemeClr val="accent1"/>
+          </a:lnRef>
+          <a:fillRef idx="0">
+            <a:schemeClr val="accent1"/>
+          </a:fillRef>
+          <a:effectRef idx="1">
+            <a:schemeClr val="accent1"/>
+          </a:effectRef>
+          <a:fontRef idx="minor">
+            <a:schemeClr val="tx1"/>
+          </a:fontRef>
+        </p:style>
+      </p:cxnSp>
+      <p:sp>
+        <p:nvSpPr>
+          <p:cNvPr id="71" name="TextBox 70"/>
+          <p:cNvSpPr txBox="1"/>
+          <p:nvPr/>
+        </p:nvSpPr>
+        <p:spPr>
+          <a:xfrm>
+            <a:off x="9311519" y="2752344"/>
+            <a:ext cx="1005840" cy="292608"/>
+          </a:xfrm>
+          <a:prstGeom prst="rect">
+            <a:avLst/>
+          </a:prstGeom>
+          <a:noFill/>
+        </p:spPr>
+        <p:txBody>
+          <a:bodyPr wrap="none" anchor="t" lIns="0" rIns="0" tIns="0" bIns="0">
+            <a:spAutoFit/>
+          </a:bodyPr>
+          <a:lstStyle/>
+          <a:p>
+            <a:pPr algn="ctr"/>
+            <a:r>
+              <a:rPr sz="700" b="0">
+                <a:solidFill>
+                  <a:srgbClr val="5F6672"/>
+                </a:solidFill>
+                <a:latin typeface="Calibri"/>
+              </a:rPr>
+              <a:t>MTL Build</a:t>
+            </a:r>
+          </a:p>
+          <a:p>
+            <a:pPr algn="ctr"/>
+            <a:r>
+              <a:rPr sz="700" b="0">
+                <a:solidFill>
+                  <a:srgbClr val="5F6672"/>
+                </a:solidFill>
+                <a:latin typeface="Calibri"/>
+              </a:rPr>
+              <a:t>31-Jan-29</a:t>
+            </a:r>
+          </a:p>
+        </p:txBody>
+      </p:sp>
+      <p:cxnSp>
+        <p:nvCxnSpPr>
+          <p:cNvPr id="72" name="Connector 71"/>
+          <p:cNvCxnSpPr/>
+          <p:nvPr/>
+        </p:nvCxnSpPr>
+        <p:spPr>
+          <a:xfrm flipV="1">
+            <a:off x="9978450" y="2368296"/>
+            <a:ext cx="0" cy="128016"/>
+          </a:xfrm>
+          <a:prstGeom prst="line">
+            <a:avLst/>
+          </a:prstGeom>
+          <a:ln w="6350">
+            <a:solidFill>
+              <a:srgbClr val="B8BFC9"/>
+            </a:solidFill>
+          </a:ln>
+          <a:effectLst/>
+        </p:spPr>
+        <p:style>
+          <a:lnRef idx="2">
+            <a:schemeClr val="accent1"/>
+          </a:lnRef>
+          <a:fillRef idx="0">
+            <a:schemeClr val="accent1"/>
+          </a:fillRef>
+          <a:effectRef idx="1">
+            <a:schemeClr val="accent1"/>
+          </a:effectRef>
+          <a:fontRef idx="minor">
+            <a:schemeClr val="tx1"/>
+          </a:fontRef>
+        </p:style>
+      </p:cxnSp>
+      <p:sp>
+        <p:nvSpPr>
+          <p:cNvPr id="73" name="TextBox 72"/>
+          <p:cNvSpPr txBox="1"/>
+          <p:nvPr/>
+        </p:nvSpPr>
+        <p:spPr>
+          <a:xfrm>
+            <a:off x="9475530" y="2075688"/>
+            <a:ext cx="1005840" cy="292608"/>
+          </a:xfrm>
+          <a:prstGeom prst="rect">
+            <a:avLst/>
+          </a:prstGeom>
+          <a:noFill/>
+        </p:spPr>
+        <p:txBody>
+          <a:bodyPr wrap="none" anchor="b" lIns="0" rIns="0" tIns="0" bIns="0">
+            <a:spAutoFit/>
+          </a:bodyPr>
+          <a:lstStyle/>
+          <a:p>
+            <a:pPr algn="ctr"/>
+            <a:r>
+              <a:rPr sz="700" b="0">
+                <a:solidFill>
+                  <a:srgbClr val="5F6672"/>
+                </a:solidFill>
+                <a:latin typeface="Calibri"/>
+              </a:rPr>
+              <a:t>SN Release</a:t>
+            </a:r>
+          </a:p>
+          <a:p>
+            <a:pPr algn="ctr"/>
+            <a:r>
+              <a:rPr sz="700" b="0">
+                <a:solidFill>
+                  <a:srgbClr val="5F6672"/>
+                </a:solidFill>
+                <a:latin typeface="Calibri"/>
+              </a:rPr>
+              <a:t>12-Feb-29</a:t>
+            </a:r>
+          </a:p>
+        </p:txBody>
+      </p:sp>
+      <p:cxnSp>
+        <p:nvCxnSpPr>
+          <p:cNvPr id="74" name="Connector 73"/>
+          <p:cNvCxnSpPr/>
+          <p:nvPr/>
+        </p:nvCxnSpPr>
+        <p:spPr>
+          <a:xfrm>
+            <a:off x="10197132" y="2624327"/>
+            <a:ext cx="0" cy="301752"/>
+          </a:xfrm>
+          <a:prstGeom prst="line">
+            <a:avLst/>
+          </a:prstGeom>
+          <a:ln w="6350">
+            <a:solidFill>
+              <a:srgbClr val="B8BFC9"/>
+            </a:solidFill>
+          </a:ln>
+          <a:effectLst/>
+        </p:spPr>
+        <p:style>
+          <a:lnRef idx="2">
+            <a:schemeClr val="accent1"/>
+          </a:lnRef>
+          <a:fillRef idx="0">
+            <a:schemeClr val="accent1"/>
+          </a:fillRef>
+          <a:effectRef idx="1">
+            <a:schemeClr val="accent1"/>
+          </a:effectRef>
+          <a:fontRef idx="minor">
+            <a:schemeClr val="tx1"/>
+          </a:fontRef>
+        </p:style>
+      </p:cxnSp>
+      <p:sp>
+        <p:nvSpPr>
+          <p:cNvPr id="75" name="TextBox 74"/>
+          <p:cNvSpPr txBox="1"/>
+          <p:nvPr/>
+        </p:nvSpPr>
+        <p:spPr>
+          <a:xfrm>
+            <a:off x="9694212" y="2926079"/>
+            <a:ext cx="1005840" cy="292608"/>
+          </a:xfrm>
+          <a:prstGeom prst="rect">
+            <a:avLst/>
+          </a:prstGeom>
+          <a:noFill/>
+        </p:spPr>
+        <p:txBody>
+          <a:bodyPr wrap="none" anchor="t" lIns="0" rIns="0" tIns="0" bIns="0">
+            <a:spAutoFit/>
+          </a:bodyPr>
+          <a:lstStyle/>
+          <a:p>
+            <a:pPr algn="ctr"/>
+            <a:r>
+              <a:rPr sz="700" b="0">
+                <a:solidFill>
+                  <a:srgbClr val="5F6672"/>
+                </a:solidFill>
+                <a:latin typeface="Calibri"/>
+              </a:rPr>
+              <a:t>MTL EC</a:t>
+            </a:r>
+          </a:p>
+          <a:p>
+            <a:pPr algn="ctr"/>
+            <a:r>
+              <a:rPr sz="700" b="0">
+                <a:solidFill>
+                  <a:srgbClr val="5F6672"/>
+                </a:solidFill>
+                <a:latin typeface="Calibri"/>
+              </a:rPr>
+              <a:t>28-Feb-29</a:t>
+            </a:r>
+          </a:p>
+        </p:txBody>
+      </p:sp>
+      <p:cxnSp>
+        <p:nvCxnSpPr>
+          <p:cNvPr id="76" name="Connector 75"/>
+          <p:cNvCxnSpPr/>
+          <p:nvPr/>
+        </p:nvCxnSpPr>
+        <p:spPr>
+          <a:xfrm flipV="1">
+            <a:off x="10675499" y="2194560"/>
+            <a:ext cx="0" cy="301752"/>
+          </a:xfrm>
+          <a:prstGeom prst="line">
+            <a:avLst/>
+          </a:prstGeom>
+          <a:ln w="6350">
+            <a:solidFill>
+              <a:srgbClr val="B8BFC9"/>
+            </a:solidFill>
+          </a:ln>
+          <a:effectLst/>
+        </p:spPr>
+        <p:style>
+          <a:lnRef idx="2">
+            <a:schemeClr val="accent1"/>
+          </a:lnRef>
+          <a:fillRef idx="0">
+            <a:schemeClr val="accent1"/>
+          </a:fillRef>
+          <a:effectRef idx="1">
+            <a:schemeClr val="accent1"/>
+          </a:effectRef>
+          <a:fontRef idx="minor">
+            <a:schemeClr val="tx1"/>
+          </a:fontRef>
+        </p:style>
+      </p:cxnSp>
+      <p:sp>
+        <p:nvSpPr>
+          <p:cNvPr id="77" name="TextBox 76"/>
+          <p:cNvSpPr txBox="1"/>
+          <p:nvPr/>
+        </p:nvSpPr>
+        <p:spPr>
+          <a:xfrm>
+            <a:off x="10172579" y="1901952"/>
+            <a:ext cx="1005840" cy="292608"/>
+          </a:xfrm>
+          <a:prstGeom prst="rect">
+            <a:avLst/>
+          </a:prstGeom>
+          <a:noFill/>
+        </p:spPr>
+        <p:txBody>
+          <a:bodyPr wrap="none" anchor="b" lIns="0" rIns="0" tIns="0" bIns="0">
+            <a:spAutoFit/>
+          </a:bodyPr>
+          <a:lstStyle/>
+          <a:p>
+            <a:pPr algn="ctr"/>
+            <a:r>
+              <a:rPr sz="700" b="0">
+                <a:solidFill>
+                  <a:srgbClr val="5F6672"/>
+                </a:solidFill>
+                <a:latin typeface="Calibri"/>
+              </a:rPr>
+              <a:t>Agency</a:t>
+            </a:r>
+          </a:p>
+          <a:p>
+            <a:pPr algn="ctr"/>
+            <a:r>
+              <a:rPr sz="700" b="0">
+                <a:solidFill>
+                  <a:srgbClr val="5F6672"/>
+                </a:solidFill>
+                <a:latin typeface="Calibri"/>
+              </a:rPr>
+              <a:t>04-Apr-29</a:t>
+            </a:r>
+          </a:p>
+        </p:txBody>
+      </p:sp>
+      <p:cxnSp>
+        <p:nvCxnSpPr>
+          <p:cNvPr id="78" name="Connector 77"/>
+          <p:cNvCxnSpPr/>
+          <p:nvPr/>
+        </p:nvCxnSpPr>
+        <p:spPr>
+          <a:xfrm>
+            <a:off x="11153865" y="2624327"/>
+            <a:ext cx="0" cy="128017"/>
+          </a:xfrm>
+          <a:prstGeom prst="line">
+            <a:avLst/>
+          </a:prstGeom>
+          <a:ln w="6350">
+            <a:solidFill>
+              <a:srgbClr val="B8BFC9"/>
+            </a:solidFill>
+          </a:ln>
+          <a:effectLst/>
+        </p:spPr>
+        <p:style>
+          <a:lnRef idx="2">
+            <a:schemeClr val="accent1"/>
+          </a:lnRef>
+          <a:fillRef idx="0">
+            <a:schemeClr val="accent1"/>
+          </a:fillRef>
+          <a:effectRef idx="1">
+            <a:schemeClr val="accent1"/>
+          </a:effectRef>
+          <a:fontRef idx="minor">
+            <a:schemeClr val="tx1"/>
+          </a:fontRef>
+        </p:style>
+      </p:cxnSp>
+      <p:sp>
+        <p:nvSpPr>
+          <p:cNvPr id="79" name="TextBox 78"/>
+          <p:cNvSpPr txBox="1"/>
+          <p:nvPr/>
+        </p:nvSpPr>
+        <p:spPr>
+          <a:xfrm>
+            <a:off x="10650945" y="2752344"/>
+            <a:ext cx="1005840" cy="292608"/>
+          </a:xfrm>
+          <a:prstGeom prst="rect">
+            <a:avLst/>
+          </a:prstGeom>
+          <a:noFill/>
+        </p:spPr>
+        <p:txBody>
+          <a:bodyPr wrap="none" anchor="t" lIns="0" rIns="0" tIns="0" bIns="0">
+            <a:spAutoFit/>
+          </a:bodyPr>
+          <a:lstStyle/>
+          <a:p>
+            <a:pPr algn="ctr"/>
+            <a:r>
+              <a:rPr sz="750" b="1">
+                <a:solidFill>
+                  <a:srgbClr val="262626"/>
+                </a:solidFill>
+                <a:latin typeface="Calibri"/>
+              </a:rPr>
+              <a:t>1st Prod</a:t>
+            </a:r>
+          </a:p>
+          <a:p>
+            <a:pPr algn="ctr"/>
+            <a:r>
+              <a:rPr sz="750" b="1">
+                <a:solidFill>
+                  <a:srgbClr val="262626"/>
+                </a:solidFill>
+                <a:latin typeface="Calibri"/>
+              </a:rPr>
+              <a:t>09-May-29</a:t>
+            </a:r>
+          </a:p>
+        </p:txBody>
+      </p:sp>
+      <p:sp>
+        <p:nvSpPr>
+          <p:cNvPr id="80" name="Rectangle 79"/>
+          <p:cNvSpPr/>
+          <p:nvPr/>
+        </p:nvSpPr>
+        <p:spPr>
+          <a:xfrm rot="2700000">
+            <a:off x="5935037" y="2521519"/>
+            <a:ext cx="77601" cy="77601"/>
+          </a:xfrm>
+          <a:prstGeom prst="rect">
+            <a:avLst/>
+          </a:prstGeom>
+          <a:solidFill>
+            <a:srgbClr val="2E74B5"/>
+          </a:solidFill>
+          <a:ln w="12700">
+            <a:solidFill>
+              <a:srgbClr val="FFFFFF"/>
+            </a:solidFill>
+          </a:ln>
+          <a:effectLst/>
+        </p:spPr>
+        <p:style>
+          <a:lnRef idx="1">
+            <a:schemeClr val="accent1"/>
+          </a:lnRef>
+          <a:fillRef idx="3">
+            <a:schemeClr val="accent1"/>
+          </a:fillRef>
+          <a:effectRef idx="2">
+            <a:schemeClr val="accent1"/>
+          </a:effectRef>
+          <a:fontRef idx="minor">
+            <a:schemeClr val="lt1"/>
+          </a:fontRef>
+        </p:style>
+        <p:txBody>
+          <a:bodyPr rtlCol="0" anchor="ctr"/>
+          <a:lstStyle/>
+          <a:p>
+            <a:pPr algn="ctr"/>
+          </a:p>
+        </p:txBody>
+      </p:sp>
+      <p:sp>
+        <p:nvSpPr>
+          <p:cNvPr id="81" name="Rectangle 80"/>
+          <p:cNvSpPr/>
+          <p:nvPr/>
+        </p:nvSpPr>
+        <p:spPr>
+          <a:xfrm rot="2700000">
+            <a:off x="8162859" y="2521519"/>
+            <a:ext cx="77601" cy="77601"/>
+          </a:xfrm>
+          <a:prstGeom prst="rect">
+            <a:avLst/>
+          </a:prstGeom>
+          <a:solidFill>
+            <a:srgbClr val="2E74B5"/>
+          </a:solidFill>
+          <a:ln w="12700">
+            <a:solidFill>
+              <a:srgbClr val="FFFFFF"/>
+            </a:solidFill>
+          </a:ln>
+          <a:effectLst/>
+        </p:spPr>
+        <p:style>
+          <a:lnRef idx="1">
+            <a:schemeClr val="accent1"/>
+          </a:lnRef>
+          <a:fillRef idx="3">
+            <a:schemeClr val="accent1"/>
+          </a:fillRef>
+          <a:effectRef idx="2">
+            <a:schemeClr val="accent1"/>
+          </a:effectRef>
+          <a:fontRef idx="minor">
+            <a:schemeClr val="lt1"/>
+          </a:fontRef>
+        </p:style>
+        <p:txBody>
+          <a:bodyPr rtlCol="0" anchor="ctr"/>
+          <a:lstStyle/>
+          <a:p>
+            <a:pPr algn="ctr"/>
+          </a:p>
+        </p:txBody>
+      </p:sp>
+      <p:sp>
+        <p:nvSpPr>
+          <p:cNvPr id="82" name="Rectangle 81"/>
+          <p:cNvSpPr/>
+          <p:nvPr/>
+        </p:nvSpPr>
+        <p:spPr>
+          <a:xfrm rot="2700000">
+            <a:off x="9365609" y="2521519"/>
+            <a:ext cx="77601" cy="77601"/>
+          </a:xfrm>
+          <a:prstGeom prst="rect">
+            <a:avLst/>
+          </a:prstGeom>
+          <a:solidFill>
+            <a:srgbClr val="2E74B5"/>
+          </a:solidFill>
+          <a:ln w="12700">
+            <a:solidFill>
+              <a:srgbClr val="FFFFFF"/>
+            </a:solidFill>
+          </a:ln>
+          <a:effectLst/>
+        </p:spPr>
+        <p:style>
+          <a:lnRef idx="1">
+            <a:schemeClr val="accent1"/>
+          </a:lnRef>
+          <a:fillRef idx="3">
+            <a:schemeClr val="accent1"/>
+          </a:fillRef>
+          <a:effectRef idx="2">
+            <a:schemeClr val="accent1"/>
+          </a:effectRef>
+          <a:fontRef idx="minor">
+            <a:schemeClr val="lt1"/>
+          </a:fontRef>
+        </p:style>
+        <p:txBody>
+          <a:bodyPr rtlCol="0" anchor="ctr"/>
+          <a:lstStyle/>
+          <a:p>
+            <a:pPr algn="ctr"/>
+          </a:p>
+        </p:txBody>
+      </p:sp>
+      <p:sp>
+        <p:nvSpPr>
+          <p:cNvPr id="83" name="Rectangle 82"/>
+          <p:cNvSpPr/>
+          <p:nvPr/>
+        </p:nvSpPr>
+        <p:spPr>
+          <a:xfrm rot="2700000">
+            <a:off x="9775638" y="2521519"/>
+            <a:ext cx="77601" cy="77601"/>
+          </a:xfrm>
+          <a:prstGeom prst="rect">
+            <a:avLst/>
+          </a:prstGeom>
+          <a:solidFill>
+            <a:srgbClr val="2E74B5"/>
+          </a:solidFill>
+          <a:ln w="12700">
+            <a:solidFill>
+              <a:srgbClr val="FFFFFF"/>
+            </a:solidFill>
+          </a:ln>
+          <a:effectLst/>
+        </p:spPr>
+        <p:style>
+          <a:lnRef idx="1">
+            <a:schemeClr val="accent1"/>
+          </a:lnRef>
+          <a:fillRef idx="3">
+            <a:schemeClr val="accent1"/>
+          </a:fillRef>
+          <a:effectRef idx="2">
+            <a:schemeClr val="accent1"/>
+          </a:effectRef>
+          <a:fontRef idx="minor">
+            <a:schemeClr val="lt1"/>
+          </a:fontRef>
+        </p:style>
+        <p:txBody>
+          <a:bodyPr rtlCol="0" anchor="ctr"/>
+          <a:lstStyle/>
+          <a:p>
+            <a:pPr algn="ctr"/>
+          </a:p>
+        </p:txBody>
+      </p:sp>
+      <p:sp>
+        <p:nvSpPr>
+          <p:cNvPr id="84" name="Rectangle 83"/>
+          <p:cNvSpPr/>
+          <p:nvPr/>
+        </p:nvSpPr>
+        <p:spPr>
+          <a:xfrm rot="2700000">
+            <a:off x="9939649" y="2521519"/>
+            <a:ext cx="77601" cy="77601"/>
+          </a:xfrm>
+          <a:prstGeom prst="rect">
+            <a:avLst/>
+          </a:prstGeom>
+          <a:solidFill>
+            <a:srgbClr val="2E74B5"/>
+          </a:solidFill>
+          <a:ln w="12700">
+            <a:solidFill>
+              <a:srgbClr val="FFFFFF"/>
+            </a:solidFill>
+          </a:ln>
+          <a:effectLst/>
+        </p:spPr>
+        <p:style>
+          <a:lnRef idx="1">
+            <a:schemeClr val="accent1"/>
+          </a:lnRef>
+          <a:fillRef idx="3">
+            <a:schemeClr val="accent1"/>
+          </a:fillRef>
+          <a:effectRef idx="2">
+            <a:schemeClr val="accent1"/>
+          </a:effectRef>
+          <a:fontRef idx="minor">
+            <a:schemeClr val="lt1"/>
+          </a:fontRef>
+        </p:style>
+        <p:txBody>
+          <a:bodyPr rtlCol="0" anchor="ctr"/>
+          <a:lstStyle/>
+          <a:p>
+            <a:pPr algn="ctr"/>
+          </a:p>
+        </p:txBody>
+      </p:sp>
+      <p:sp>
+        <p:nvSpPr>
+          <p:cNvPr id="85" name="Rectangle 84"/>
+          <p:cNvSpPr/>
+          <p:nvPr/>
+        </p:nvSpPr>
+        <p:spPr>
+          <a:xfrm rot="2700000">
+            <a:off x="10158331" y="2521519"/>
+            <a:ext cx="77601" cy="77601"/>
+          </a:xfrm>
+          <a:prstGeom prst="rect">
+            <a:avLst/>
+          </a:prstGeom>
+          <a:solidFill>
+            <a:srgbClr val="2E74B5"/>
+          </a:solidFill>
+          <a:ln w="12700">
+            <a:solidFill>
+              <a:srgbClr val="FFFFFF"/>
+            </a:solidFill>
+          </a:ln>
+          <a:effectLst/>
+        </p:spPr>
+        <p:style>
+          <a:lnRef idx="1">
+            <a:schemeClr val="accent1"/>
+          </a:lnRef>
+          <a:fillRef idx="3">
+            <a:schemeClr val="accent1"/>
+          </a:fillRef>
+          <a:effectRef idx="2">
+            <a:schemeClr val="accent1"/>
+          </a:effectRef>
+          <a:fontRef idx="minor">
+            <a:schemeClr val="lt1"/>
+          </a:fontRef>
+        </p:style>
+        <p:txBody>
+          <a:bodyPr rtlCol="0" anchor="ctr"/>
+          <a:lstStyle/>
+          <a:p>
+            <a:pPr algn="ctr"/>
+          </a:p>
+        </p:txBody>
+      </p:sp>
+      <p:sp>
+        <p:nvSpPr>
+          <p:cNvPr id="86" name="Rectangle 85"/>
+          <p:cNvSpPr/>
+          <p:nvPr/>
+        </p:nvSpPr>
+        <p:spPr>
+          <a:xfrm rot="2700000">
+            <a:off x="10636698" y="2521519"/>
+            <a:ext cx="77601" cy="77601"/>
+          </a:xfrm>
+          <a:prstGeom prst="rect">
+            <a:avLst/>
+          </a:prstGeom>
+          <a:solidFill>
+            <a:srgbClr val="2E74B5"/>
+          </a:solidFill>
+          <a:ln w="12700">
+            <a:solidFill>
+              <a:srgbClr val="FFFFFF"/>
+            </a:solidFill>
+          </a:ln>
+          <a:effectLst/>
+        </p:spPr>
+        <p:style>
+          <a:lnRef idx="1">
+            <a:schemeClr val="accent1"/>
+          </a:lnRef>
+          <a:fillRef idx="3">
+            <a:schemeClr val="accent1"/>
+          </a:fillRef>
+          <a:effectRef idx="2">
+            <a:schemeClr val="accent1"/>
+          </a:effectRef>
+          <a:fontRef idx="minor">
+            <a:schemeClr val="lt1"/>
+          </a:fontRef>
+        </p:style>
+        <p:txBody>
+          <a:bodyPr rtlCol="0" anchor="ctr"/>
+          <a:lstStyle/>
+          <a:p>
+            <a:pPr algn="ctr"/>
+          </a:p>
+        </p:txBody>
+      </p:sp>
+      <p:sp>
+        <p:nvSpPr>
+          <p:cNvPr id="87" name="Rectangle 86"/>
+          <p:cNvSpPr/>
+          <p:nvPr/>
+        </p:nvSpPr>
+        <p:spPr>
+          <a:xfrm rot="2700000">
+            <a:off x="11098898" y="2505352"/>
+            <a:ext cx="109934" cy="109934"/>
+          </a:xfrm>
+          <a:prstGeom prst="rect">
+            <a:avLst/>
+          </a:prstGeom>
+          <a:solidFill>
+            <a:srgbClr val="2E74B5"/>
+          </a:solidFill>
+          <a:ln w="12700">
+            <a:solidFill>
+              <a:srgbClr val="FFFFFF"/>
+            </a:solidFill>
+          </a:ln>
+          <a:effectLst/>
+        </p:spPr>
+        <p:style>
+          <a:lnRef idx="1">
+            <a:schemeClr val="accent1"/>
+          </a:lnRef>
+          <a:fillRef idx="3">
+            <a:schemeClr val="accent1"/>
+          </a:fillRef>
+          <a:effectRef idx="2">
+            <a:schemeClr val="accent1"/>
+          </a:effectRef>
+          <a:fontRef idx="minor">
+            <a:schemeClr val="lt1"/>
+          </a:fontRef>
+        </p:style>
+        <p:txBody>
+          <a:bodyPr rtlCol="0" anchor="ctr"/>
+          <a:lstStyle/>
+          <a:p>
+            <a:pPr algn="ctr"/>
+          </a:p>
+        </p:txBody>
+      </p:sp>
+      <p:sp>
+        <p:nvSpPr>
+          <p:cNvPr id="88" name="Rectangle 87"/>
+          <p:cNvSpPr/>
+          <p:nvPr/>
+        </p:nvSpPr>
+        <p:spPr>
+          <a:xfrm>
+            <a:off x="3586431" y="3623310"/>
+            <a:ext cx="5376188" cy="68580"/>
+          </a:xfrm>
+          <a:prstGeom prst="rect">
+            <a:avLst/>
+          </a:prstGeom>
+          <a:solidFill>
+            <a:srgbClr val="0F8A6C"/>
+          </a:solidFill>
+          <a:ln>
+            <a:noFill/>
+          </a:ln>
+          <a:effectLst/>
+        </p:spPr>
+        <p:style>
+          <a:lnRef idx="1">
+            <a:schemeClr val="accent1"/>
+          </a:lnRef>
+          <a:fillRef idx="3">
+            <a:schemeClr val="accent1"/>
+          </a:fillRef>
+          <a:effectRef idx="2">
+            <a:schemeClr val="accent1"/>
+          </a:effectRef>
+          <a:fontRef idx="minor">
+            <a:schemeClr val="lt1"/>
+          </a:fontRef>
+        </p:style>
+        <p:txBody>
+          <a:bodyPr rtlCol="0" anchor="ctr"/>
+          <a:lstStyle/>
+          <a:p>
+            <a:pPr algn="ctr"/>
+          </a:p>
+        </p:txBody>
+      </p:sp>
+      <p:cxnSp>
+        <p:nvCxnSpPr>
+          <p:cNvPr id="89" name="Connector 88"/>
+          <p:cNvCxnSpPr/>
+          <p:nvPr/>
+        </p:nvCxnSpPr>
+        <p:spPr>
+          <a:xfrm flipV="1">
+            <a:off x="3623007" y="3291840"/>
+            <a:ext cx="0" cy="301752"/>
+          </a:xfrm>
+          <a:prstGeom prst="line">
+            <a:avLst/>
+          </a:prstGeom>
+          <a:ln w="6350">
+            <a:solidFill>
+              <a:srgbClr val="B8BFC9"/>
+            </a:solidFill>
+          </a:ln>
+          <a:effectLst/>
+        </p:spPr>
+        <p:style>
+          <a:lnRef idx="2">
+            <a:schemeClr val="accent1"/>
+          </a:lnRef>
+          <a:fillRef idx="0">
+            <a:schemeClr val="accent1"/>
+          </a:fillRef>
+          <a:effectRef idx="1">
+            <a:schemeClr val="accent1"/>
+          </a:effectRef>
+          <a:fontRef idx="minor">
+            <a:schemeClr val="tx1"/>
+          </a:fontRef>
+        </p:style>
+      </p:cxnSp>
+      <p:sp>
+        <p:nvSpPr>
+          <p:cNvPr id="90" name="TextBox 89"/>
+          <p:cNvSpPr txBox="1"/>
+          <p:nvPr/>
+        </p:nvSpPr>
+        <p:spPr>
+          <a:xfrm>
+            <a:off x="3120087" y="2999232"/>
+            <a:ext cx="1005840" cy="292608"/>
+          </a:xfrm>
+          <a:prstGeom prst="rect">
+            <a:avLst/>
+          </a:prstGeom>
+          <a:noFill/>
+        </p:spPr>
+        <p:txBody>
+          <a:bodyPr wrap="none" anchor="b" lIns="0" rIns="0" tIns="0" bIns="0">
+            <a:spAutoFit/>
+          </a:bodyPr>
+          <a:lstStyle/>
+          <a:p>
+            <a:pPr algn="ctr"/>
+            <a:r>
+              <a:rPr sz="700" b="0">
+                <a:solidFill>
+                  <a:srgbClr val="5F6672"/>
+                </a:solidFill>
+                <a:latin typeface="Calibri"/>
+              </a:rPr>
+              <a:t>Testing</a:t>
+            </a:r>
+          </a:p>
+          <a:p>
+            <a:pPr algn="ctr"/>
+            <a:r>
+              <a:rPr sz="700" b="0">
+                <a:solidFill>
+                  <a:srgbClr val="5F6672"/>
+                </a:solidFill>
+                <a:latin typeface="Calibri"/>
+              </a:rPr>
+              <a:t>05-Nov-27</a:t>
+            </a:r>
+          </a:p>
+        </p:txBody>
+      </p:sp>
+      <p:cxnSp>
+        <p:nvCxnSpPr>
+          <p:cNvPr id="91" name="Connector 90"/>
+          <p:cNvCxnSpPr/>
+          <p:nvPr/>
+        </p:nvCxnSpPr>
+        <p:spPr>
+          <a:xfrm>
+            <a:off x="5973838" y="3721608"/>
+            <a:ext cx="0" cy="301752"/>
+          </a:xfrm>
+          <a:prstGeom prst="line">
+            <a:avLst/>
+          </a:prstGeom>
+          <a:ln w="6350">
+            <a:solidFill>
+              <a:srgbClr val="B8BFC9"/>
+            </a:solidFill>
+          </a:ln>
+          <a:effectLst/>
+        </p:spPr>
+        <p:style>
+          <a:lnRef idx="2">
+            <a:schemeClr val="accent1"/>
+          </a:lnRef>
+          <a:fillRef idx="0">
+            <a:schemeClr val="accent1"/>
+          </a:fillRef>
+          <a:effectRef idx="1">
+            <a:schemeClr val="accent1"/>
+          </a:effectRef>
+          <a:fontRef idx="minor">
+            <a:schemeClr val="tx1"/>
+          </a:fontRef>
+        </p:style>
+      </p:cxnSp>
+      <p:sp>
+        <p:nvSpPr>
+          <p:cNvPr id="92" name="TextBox 91"/>
+          <p:cNvSpPr txBox="1"/>
+          <p:nvPr/>
+        </p:nvSpPr>
+        <p:spPr>
+          <a:xfrm>
+            <a:off x="5470918" y="4023360"/>
+            <a:ext cx="1005840" cy="292608"/>
+          </a:xfrm>
+          <a:prstGeom prst="rect">
+            <a:avLst/>
+          </a:prstGeom>
+          <a:noFill/>
+        </p:spPr>
+        <p:txBody>
+          <a:bodyPr wrap="none" anchor="t" lIns="0" rIns="0" tIns="0" bIns="0">
+            <a:spAutoFit/>
+          </a:bodyPr>
+          <a:lstStyle/>
+          <a:p>
+            <a:pPr algn="ctr"/>
+            <a:r>
+              <a:rPr sz="700" b="0">
+                <a:solidFill>
+                  <a:srgbClr val="5F6672"/>
+                </a:solidFill>
+                <a:latin typeface="Calibri"/>
+              </a:rPr>
+              <a:t>EC @25</a:t>
+            </a:r>
+          </a:p>
+          <a:p>
+            <a:pPr algn="ctr"/>
+            <a:r>
+              <a:rPr sz="700" b="0">
+                <a:solidFill>
+                  <a:srgbClr val="5F6672"/>
+                </a:solidFill>
+                <a:latin typeface="Calibri"/>
+              </a:rPr>
+              <a:t>25-Apr-28</a:t>
+            </a:r>
+          </a:p>
+        </p:txBody>
+      </p:sp>
+      <p:cxnSp>
+        <p:nvCxnSpPr>
+          <p:cNvPr id="93" name="Connector 92"/>
+          <p:cNvCxnSpPr/>
+          <p:nvPr/>
+        </p:nvCxnSpPr>
+        <p:spPr>
+          <a:xfrm flipV="1">
+            <a:off x="7149253" y="3465576"/>
+            <a:ext cx="0" cy="128016"/>
+          </a:xfrm>
+          <a:prstGeom prst="line">
+            <a:avLst/>
+          </a:prstGeom>
+          <a:ln w="6350">
+            <a:solidFill>
+              <a:srgbClr val="B8BFC9"/>
+            </a:solidFill>
+          </a:ln>
+          <a:effectLst/>
+        </p:spPr>
+        <p:style>
+          <a:lnRef idx="2">
+            <a:schemeClr val="accent1"/>
+          </a:lnRef>
+          <a:fillRef idx="0">
+            <a:schemeClr val="accent1"/>
+          </a:fillRef>
+          <a:effectRef idx="1">
+            <a:schemeClr val="accent1"/>
+          </a:effectRef>
+          <a:fontRef idx="minor">
+            <a:schemeClr val="tx1"/>
+          </a:fontRef>
+        </p:style>
+      </p:cxnSp>
+      <p:sp>
+        <p:nvSpPr>
+          <p:cNvPr id="94" name="TextBox 93"/>
+          <p:cNvSpPr txBox="1"/>
+          <p:nvPr/>
+        </p:nvSpPr>
+        <p:spPr>
+          <a:xfrm>
+            <a:off x="6646333" y="3172968"/>
+            <a:ext cx="1005840" cy="292608"/>
+          </a:xfrm>
+          <a:prstGeom prst="rect">
+            <a:avLst/>
+          </a:prstGeom>
+          <a:noFill/>
+        </p:spPr>
+        <p:txBody>
+          <a:bodyPr wrap="none" anchor="b" lIns="0" rIns="0" tIns="0" bIns="0">
+            <a:spAutoFit/>
+          </a:bodyPr>
+          <a:lstStyle/>
+          <a:p>
+            <a:pPr algn="ctr"/>
+            <a:r>
+              <a:rPr sz="700" b="0">
+                <a:solidFill>
+                  <a:srgbClr val="5F6672"/>
+                </a:solidFill>
+                <a:latin typeface="Calibri"/>
+              </a:rPr>
+              <a:t>SN Deliv.</a:t>
+            </a:r>
+          </a:p>
+          <a:p>
+            <a:pPr algn="ctr"/>
+            <a:r>
+              <a:rPr sz="700" b="0">
+                <a:solidFill>
+                  <a:srgbClr val="5F6672"/>
+                </a:solidFill>
+                <a:latin typeface="Calibri"/>
+              </a:rPr>
+              <a:t>20-Jul-28</a:t>
+            </a:r>
+          </a:p>
+        </p:txBody>
+      </p:sp>
+      <p:cxnSp>
+        <p:nvCxnSpPr>
+          <p:cNvPr id="95" name="Connector 94"/>
+          <p:cNvCxnSpPr/>
+          <p:nvPr/>
+        </p:nvCxnSpPr>
+        <p:spPr>
+          <a:xfrm>
+            <a:off x="7586617" y="3721608"/>
+            <a:ext cx="0" cy="128016"/>
+          </a:xfrm>
+          <a:prstGeom prst="line">
+            <a:avLst/>
+          </a:prstGeom>
+          <a:ln w="6350">
+            <a:solidFill>
+              <a:srgbClr val="B8BFC9"/>
+            </a:solidFill>
+          </a:ln>
+          <a:effectLst/>
+        </p:spPr>
+        <p:style>
+          <a:lnRef idx="2">
+            <a:schemeClr val="accent1"/>
+          </a:lnRef>
+          <a:fillRef idx="0">
+            <a:schemeClr val="accent1"/>
+          </a:fillRef>
+          <a:effectRef idx="1">
+            <a:schemeClr val="accent1"/>
+          </a:effectRef>
+          <a:fontRef idx="minor">
+            <a:schemeClr val="tx1"/>
+          </a:fontRef>
+        </p:style>
+      </p:cxnSp>
+      <p:sp>
+        <p:nvSpPr>
+          <p:cNvPr id="96" name="TextBox 95"/>
+          <p:cNvSpPr txBox="1"/>
+          <p:nvPr/>
+        </p:nvSpPr>
+        <p:spPr>
+          <a:xfrm>
+            <a:off x="7083697" y="3849624"/>
+            <a:ext cx="1005840" cy="292608"/>
+          </a:xfrm>
+          <a:prstGeom prst="rect">
+            <a:avLst/>
+          </a:prstGeom>
+          <a:noFill/>
+        </p:spPr>
+        <p:txBody>
+          <a:bodyPr wrap="none" anchor="t" lIns="0" rIns="0" tIns="0" bIns="0">
+            <a:spAutoFit/>
+          </a:bodyPr>
+          <a:lstStyle/>
+          <a:p>
+            <a:pPr algn="ctr"/>
+            <a:r>
+              <a:rPr sz="700" b="0">
+                <a:solidFill>
+                  <a:srgbClr val="5F6672"/>
+                </a:solidFill>
+                <a:latin typeface="Calibri"/>
+              </a:rPr>
+              <a:t>MTL Build</a:t>
+            </a:r>
+          </a:p>
+          <a:p>
+            <a:pPr algn="ctr"/>
+            <a:r>
+              <a:rPr sz="700" b="0">
+                <a:solidFill>
+                  <a:srgbClr val="5F6672"/>
+                </a:solidFill>
+                <a:latin typeface="Calibri"/>
+              </a:rPr>
+              <a:t>21-Aug-28</a:t>
+            </a:r>
+          </a:p>
+        </p:txBody>
+      </p:sp>
+      <p:cxnSp>
+        <p:nvCxnSpPr>
+          <p:cNvPr id="97" name="Connector 96"/>
+          <p:cNvCxnSpPr/>
+          <p:nvPr/>
+        </p:nvCxnSpPr>
+        <p:spPr>
+          <a:xfrm flipV="1">
+            <a:off x="7723293" y="3291840"/>
+            <a:ext cx="0" cy="301752"/>
+          </a:xfrm>
+          <a:prstGeom prst="line">
+            <a:avLst/>
+          </a:prstGeom>
+          <a:ln w="6350">
+            <a:solidFill>
+              <a:srgbClr val="B8BFC9"/>
+            </a:solidFill>
+          </a:ln>
+          <a:effectLst/>
+        </p:spPr>
+        <p:style>
+          <a:lnRef idx="2">
+            <a:schemeClr val="accent1"/>
+          </a:lnRef>
+          <a:fillRef idx="0">
+            <a:schemeClr val="accent1"/>
+          </a:fillRef>
+          <a:effectRef idx="1">
+            <a:schemeClr val="accent1"/>
+          </a:effectRef>
+          <a:fontRef idx="minor">
+            <a:schemeClr val="tx1"/>
+          </a:fontRef>
+        </p:style>
+      </p:cxnSp>
+      <p:sp>
+        <p:nvSpPr>
+          <p:cNvPr id="98" name="TextBox 97"/>
+          <p:cNvSpPr txBox="1"/>
+          <p:nvPr/>
+        </p:nvSpPr>
+        <p:spPr>
+          <a:xfrm>
+            <a:off x="7220373" y="2999232"/>
+            <a:ext cx="1005840" cy="292608"/>
+          </a:xfrm>
+          <a:prstGeom prst="rect">
+            <a:avLst/>
+          </a:prstGeom>
+          <a:noFill/>
+        </p:spPr>
+        <p:txBody>
+          <a:bodyPr wrap="none" anchor="b" lIns="0" rIns="0" tIns="0" bIns="0">
+            <a:spAutoFit/>
+          </a:bodyPr>
+          <a:lstStyle/>
+          <a:p>
+            <a:pPr algn="ctr"/>
+            <a:r>
+              <a:rPr sz="700" b="0">
+                <a:solidFill>
+                  <a:srgbClr val="5F6672"/>
+                </a:solidFill>
+                <a:latin typeface="Calibri"/>
+              </a:rPr>
+              <a:t>SN Release</a:t>
+            </a:r>
+          </a:p>
+          <a:p>
+            <a:pPr algn="ctr"/>
+            <a:r>
+              <a:rPr sz="700" b="0">
+                <a:solidFill>
+                  <a:srgbClr val="5F6672"/>
+                </a:solidFill>
+                <a:latin typeface="Calibri"/>
+              </a:rPr>
+              <a:t>31-Aug-28</a:t>
+            </a:r>
+          </a:p>
+        </p:txBody>
+      </p:sp>
+      <p:cxnSp>
+        <p:nvCxnSpPr>
+          <p:cNvPr id="99" name="Connector 98"/>
+          <p:cNvCxnSpPr/>
+          <p:nvPr/>
+        </p:nvCxnSpPr>
+        <p:spPr>
+          <a:xfrm>
+            <a:off x="7969310" y="3721608"/>
+            <a:ext cx="0" cy="301752"/>
+          </a:xfrm>
+          <a:prstGeom prst="line">
+            <a:avLst/>
+          </a:prstGeom>
+          <a:ln w="6350">
+            <a:solidFill>
+              <a:srgbClr val="B8BFC9"/>
+            </a:solidFill>
+          </a:ln>
+          <a:effectLst/>
+        </p:spPr>
+        <p:style>
+          <a:lnRef idx="2">
+            <a:schemeClr val="accent1"/>
+          </a:lnRef>
+          <a:fillRef idx="0">
+            <a:schemeClr val="accent1"/>
+          </a:fillRef>
+          <a:effectRef idx="1">
+            <a:schemeClr val="accent1"/>
+          </a:effectRef>
+          <a:fontRef idx="minor">
+            <a:schemeClr val="tx1"/>
+          </a:fontRef>
+        </p:style>
+      </p:cxnSp>
+      <p:sp>
+        <p:nvSpPr>
+          <p:cNvPr id="100" name="TextBox 99"/>
+          <p:cNvSpPr txBox="1"/>
+          <p:nvPr/>
+        </p:nvSpPr>
+        <p:spPr>
+          <a:xfrm>
+            <a:off x="7466390" y="4023360"/>
+            <a:ext cx="1005840" cy="292608"/>
+          </a:xfrm>
+          <a:prstGeom prst="rect">
+            <a:avLst/>
+          </a:prstGeom>
+          <a:noFill/>
+        </p:spPr>
+        <p:txBody>
+          <a:bodyPr wrap="none" anchor="t" lIns="0" rIns="0" tIns="0" bIns="0">
+            <a:spAutoFit/>
+          </a:bodyPr>
+          <a:lstStyle/>
+          <a:p>
+            <a:pPr algn="ctr"/>
+            <a:r>
+              <a:rPr sz="700" b="0">
+                <a:solidFill>
+                  <a:srgbClr val="5F6672"/>
+                </a:solidFill>
+                <a:latin typeface="Calibri"/>
+              </a:rPr>
+              <a:t>MTL EC</a:t>
+            </a:r>
+          </a:p>
+          <a:p>
+            <a:pPr algn="ctr"/>
+            <a:r>
+              <a:rPr sz="700" b="0">
+                <a:solidFill>
+                  <a:srgbClr val="5F6672"/>
+                </a:solidFill>
+                <a:latin typeface="Calibri"/>
+              </a:rPr>
+              <a:t>18-Sep-28</a:t>
+            </a:r>
+          </a:p>
+        </p:txBody>
+      </p:sp>
+      <p:cxnSp>
+        <p:nvCxnSpPr>
+          <p:cNvPr id="101" name="Connector 100"/>
+          <p:cNvCxnSpPr/>
+          <p:nvPr/>
+        </p:nvCxnSpPr>
+        <p:spPr>
+          <a:xfrm flipV="1">
+            <a:off x="8447677" y="3465576"/>
+            <a:ext cx="0" cy="128016"/>
+          </a:xfrm>
+          <a:prstGeom prst="line">
+            <a:avLst/>
+          </a:prstGeom>
+          <a:ln w="6350">
+            <a:solidFill>
+              <a:srgbClr val="B8BFC9"/>
+            </a:solidFill>
+          </a:ln>
+          <a:effectLst/>
+        </p:spPr>
+        <p:style>
+          <a:lnRef idx="2">
+            <a:schemeClr val="accent1"/>
+          </a:lnRef>
+          <a:fillRef idx="0">
+            <a:schemeClr val="accent1"/>
+          </a:fillRef>
+          <a:effectRef idx="1">
+            <a:schemeClr val="accent1"/>
+          </a:effectRef>
+          <a:fontRef idx="minor">
+            <a:schemeClr val="tx1"/>
+          </a:fontRef>
+        </p:style>
+      </p:cxnSp>
+      <p:sp>
+        <p:nvSpPr>
+          <p:cNvPr id="102" name="TextBox 101"/>
+          <p:cNvSpPr txBox="1"/>
+          <p:nvPr/>
+        </p:nvSpPr>
+        <p:spPr>
+          <a:xfrm>
+            <a:off x="7944757" y="3172968"/>
+            <a:ext cx="1005840" cy="292608"/>
+          </a:xfrm>
+          <a:prstGeom prst="rect">
+            <a:avLst/>
+          </a:prstGeom>
+          <a:noFill/>
+        </p:spPr>
+        <p:txBody>
+          <a:bodyPr wrap="none" anchor="b" lIns="0" rIns="0" tIns="0" bIns="0">
+            <a:spAutoFit/>
+          </a:bodyPr>
+          <a:lstStyle/>
+          <a:p>
+            <a:pPr algn="ctr"/>
+            <a:r>
+              <a:rPr sz="700" b="0">
+                <a:solidFill>
+                  <a:srgbClr val="5F6672"/>
+                </a:solidFill>
+                <a:latin typeface="Calibri"/>
+              </a:rPr>
+              <a:t>Agency</a:t>
+            </a:r>
+          </a:p>
+          <a:p>
+            <a:pPr algn="ctr"/>
+            <a:r>
+              <a:rPr sz="700" b="0">
+                <a:solidFill>
+                  <a:srgbClr val="5F6672"/>
+                </a:solidFill>
+                <a:latin typeface="Calibri"/>
+              </a:rPr>
+              <a:t>23-Oct-28</a:t>
+            </a:r>
+          </a:p>
+        </p:txBody>
+      </p:sp>
+      <p:cxnSp>
+        <p:nvCxnSpPr>
+          <p:cNvPr id="103" name="Connector 102"/>
+          <p:cNvCxnSpPr/>
+          <p:nvPr/>
+        </p:nvCxnSpPr>
+        <p:spPr>
+          <a:xfrm>
+            <a:off x="8926043" y="3721608"/>
+            <a:ext cx="0" cy="128016"/>
+          </a:xfrm>
+          <a:prstGeom prst="line">
+            <a:avLst/>
+          </a:prstGeom>
+          <a:ln w="6350">
+            <a:solidFill>
+              <a:srgbClr val="B8BFC9"/>
+            </a:solidFill>
+          </a:ln>
+          <a:effectLst/>
+        </p:spPr>
+        <p:style>
+          <a:lnRef idx="2">
+            <a:schemeClr val="accent1"/>
+          </a:lnRef>
+          <a:fillRef idx="0">
+            <a:schemeClr val="accent1"/>
+          </a:fillRef>
+          <a:effectRef idx="1">
+            <a:schemeClr val="accent1"/>
+          </a:effectRef>
+          <a:fontRef idx="minor">
+            <a:schemeClr val="tx1"/>
+          </a:fontRef>
+        </p:style>
+      </p:cxnSp>
+      <p:sp>
+        <p:nvSpPr>
+          <p:cNvPr id="104" name="TextBox 103"/>
+          <p:cNvSpPr txBox="1"/>
+          <p:nvPr/>
+        </p:nvSpPr>
+        <p:spPr>
+          <a:xfrm>
+            <a:off x="8423123" y="3849624"/>
+            <a:ext cx="1005840" cy="292608"/>
+          </a:xfrm>
+          <a:prstGeom prst="rect">
+            <a:avLst/>
+          </a:prstGeom>
+          <a:noFill/>
+        </p:spPr>
+        <p:txBody>
+          <a:bodyPr wrap="none" anchor="t" lIns="0" rIns="0" tIns="0" bIns="0">
+            <a:spAutoFit/>
+          </a:bodyPr>
+          <a:lstStyle/>
+          <a:p>
+            <a:pPr algn="ctr"/>
+            <a:r>
+              <a:rPr sz="750" b="1">
+                <a:solidFill>
+                  <a:srgbClr val="262626"/>
+                </a:solidFill>
+                <a:latin typeface="Calibri"/>
+              </a:rPr>
+              <a:t>1st Prod</a:t>
+            </a:r>
+          </a:p>
+          <a:p>
+            <a:pPr algn="ctr"/>
+            <a:r>
+              <a:rPr sz="750" b="1">
+                <a:solidFill>
+                  <a:srgbClr val="262626"/>
+                </a:solidFill>
+                <a:latin typeface="Calibri"/>
+              </a:rPr>
+              <a:t>27-Nov-28</a:t>
+            </a:r>
+          </a:p>
+        </p:txBody>
+      </p:sp>
+      <p:sp>
+        <p:nvSpPr>
+          <p:cNvPr id="105" name="Rectangle 104"/>
+          <p:cNvSpPr/>
+          <p:nvPr/>
+        </p:nvSpPr>
+        <p:spPr>
+          <a:xfrm rot="2700000">
+            <a:off x="3584207" y="3618799"/>
+            <a:ext cx="77601" cy="77601"/>
+          </a:xfrm>
+          <a:prstGeom prst="rect">
+            <a:avLst/>
+          </a:prstGeom>
+          <a:solidFill>
+            <a:srgbClr val="0F8A6C"/>
+          </a:solidFill>
+          <a:ln w="12700">
+            <a:solidFill>
+              <a:srgbClr val="FFFFFF"/>
+            </a:solidFill>
+          </a:ln>
+          <a:effectLst/>
+        </p:spPr>
+        <p:style>
+          <a:lnRef idx="1">
+            <a:schemeClr val="accent1"/>
+          </a:lnRef>
+          <a:fillRef idx="3">
+            <a:schemeClr val="accent1"/>
+          </a:fillRef>
+          <a:effectRef idx="2">
+            <a:schemeClr val="accent1"/>
+          </a:effectRef>
+          <a:fontRef idx="minor">
+            <a:schemeClr val="lt1"/>
+          </a:fontRef>
+        </p:style>
+        <p:txBody>
+          <a:bodyPr rtlCol="0" anchor="ctr"/>
+          <a:lstStyle/>
+          <a:p>
+            <a:pPr algn="ctr"/>
+          </a:p>
+        </p:txBody>
+      </p:sp>
+      <p:sp>
+        <p:nvSpPr>
+          <p:cNvPr id="106" name="Rectangle 105"/>
+          <p:cNvSpPr/>
+          <p:nvPr/>
+        </p:nvSpPr>
+        <p:spPr>
+          <a:xfrm rot="2700000">
+            <a:off x="5935037" y="3618799"/>
+            <a:ext cx="77601" cy="77601"/>
+          </a:xfrm>
+          <a:prstGeom prst="rect">
+            <a:avLst/>
+          </a:prstGeom>
+          <a:solidFill>
+            <a:srgbClr val="0F8A6C"/>
+          </a:solidFill>
+          <a:ln w="12700">
+            <a:solidFill>
+              <a:srgbClr val="FFFFFF"/>
+            </a:solidFill>
+          </a:ln>
+          <a:effectLst/>
+        </p:spPr>
+        <p:style>
+          <a:lnRef idx="1">
+            <a:schemeClr val="accent1"/>
+          </a:lnRef>
+          <a:fillRef idx="3">
+            <a:schemeClr val="accent1"/>
+          </a:fillRef>
+          <a:effectRef idx="2">
+            <a:schemeClr val="accent1"/>
+          </a:effectRef>
+          <a:fontRef idx="minor">
+            <a:schemeClr val="lt1"/>
+          </a:fontRef>
+        </p:style>
+        <p:txBody>
+          <a:bodyPr rtlCol="0" anchor="ctr"/>
+          <a:lstStyle/>
+          <a:p>
+            <a:pPr algn="ctr"/>
+          </a:p>
+        </p:txBody>
+      </p:sp>
+      <p:sp>
+        <p:nvSpPr>
+          <p:cNvPr id="107" name="Rectangle 106"/>
+          <p:cNvSpPr/>
+          <p:nvPr/>
+        </p:nvSpPr>
+        <p:spPr>
+          <a:xfrm rot="2700000">
+            <a:off x="7110452" y="3618799"/>
+            <a:ext cx="77601" cy="77601"/>
+          </a:xfrm>
+          <a:prstGeom prst="rect">
+            <a:avLst/>
+          </a:prstGeom>
+          <a:solidFill>
+            <a:srgbClr val="0F8A6C"/>
+          </a:solidFill>
+          <a:ln w="12700">
+            <a:solidFill>
+              <a:srgbClr val="FFFFFF"/>
+            </a:solidFill>
+          </a:ln>
+          <a:effectLst/>
+        </p:spPr>
+        <p:style>
+          <a:lnRef idx="1">
+            <a:schemeClr val="accent1"/>
+          </a:lnRef>
+          <a:fillRef idx="3">
+            <a:schemeClr val="accent1"/>
+          </a:fillRef>
+          <a:effectRef idx="2">
+            <a:schemeClr val="accent1"/>
+          </a:effectRef>
+          <a:fontRef idx="minor">
+            <a:schemeClr val="lt1"/>
+          </a:fontRef>
+        </p:style>
+        <p:txBody>
+          <a:bodyPr rtlCol="0" anchor="ctr"/>
+          <a:lstStyle/>
+          <a:p>
+            <a:pPr algn="ctr"/>
+          </a:p>
+        </p:txBody>
+      </p:sp>
+      <p:sp>
+        <p:nvSpPr>
+          <p:cNvPr id="108" name="Rectangle 107"/>
+          <p:cNvSpPr/>
+          <p:nvPr/>
+        </p:nvSpPr>
+        <p:spPr>
+          <a:xfrm rot="2700000">
+            <a:off x="7547816" y="3618799"/>
+            <a:ext cx="77601" cy="77601"/>
+          </a:xfrm>
+          <a:prstGeom prst="rect">
+            <a:avLst/>
+          </a:prstGeom>
+          <a:solidFill>
+            <a:srgbClr val="0F8A6C"/>
+          </a:solidFill>
+          <a:ln w="12700">
+            <a:solidFill>
+              <a:srgbClr val="FFFFFF"/>
+            </a:solidFill>
+          </a:ln>
+          <a:effectLst/>
+        </p:spPr>
+        <p:style>
+          <a:lnRef idx="1">
+            <a:schemeClr val="accent1"/>
+          </a:lnRef>
+          <a:fillRef idx="3">
+            <a:schemeClr val="accent1"/>
+          </a:fillRef>
+          <a:effectRef idx="2">
+            <a:schemeClr val="accent1"/>
+          </a:effectRef>
+          <a:fontRef idx="minor">
+            <a:schemeClr val="lt1"/>
+          </a:fontRef>
+        </p:style>
+        <p:txBody>
+          <a:bodyPr rtlCol="0" anchor="ctr"/>
+          <a:lstStyle/>
+          <a:p>
+            <a:pPr algn="ctr"/>
+          </a:p>
+        </p:txBody>
+      </p:sp>
+      <p:sp>
+        <p:nvSpPr>
+          <p:cNvPr id="109" name="Rectangle 108"/>
+          <p:cNvSpPr/>
+          <p:nvPr/>
+        </p:nvSpPr>
+        <p:spPr>
+          <a:xfrm rot="2700000">
+            <a:off x="7684492" y="3618799"/>
+            <a:ext cx="77601" cy="77601"/>
+          </a:xfrm>
+          <a:prstGeom prst="rect">
+            <a:avLst/>
+          </a:prstGeom>
+          <a:solidFill>
+            <a:srgbClr val="0F8A6C"/>
+          </a:solidFill>
+          <a:ln w="12700">
+            <a:solidFill>
+              <a:srgbClr val="FFFFFF"/>
+            </a:solidFill>
+          </a:ln>
+          <a:effectLst/>
+        </p:spPr>
+        <p:style>
+          <a:lnRef idx="1">
+            <a:schemeClr val="accent1"/>
+          </a:lnRef>
+          <a:fillRef idx="3">
+            <a:schemeClr val="accent1"/>
+          </a:fillRef>
+          <a:effectRef idx="2">
+            <a:schemeClr val="accent1"/>
+          </a:effectRef>
+          <a:fontRef idx="minor">
+            <a:schemeClr val="lt1"/>
+          </a:fontRef>
+        </p:style>
+        <p:txBody>
+          <a:bodyPr rtlCol="0" anchor="ctr"/>
+          <a:lstStyle/>
+          <a:p>
+            <a:pPr algn="ctr"/>
+          </a:p>
+        </p:txBody>
+      </p:sp>
+      <p:sp>
+        <p:nvSpPr>
+          <p:cNvPr id="110" name="Rectangle 109"/>
+          <p:cNvSpPr/>
+          <p:nvPr/>
+        </p:nvSpPr>
+        <p:spPr>
+          <a:xfrm rot="2700000">
+            <a:off x="7930509" y="3618799"/>
+            <a:ext cx="77601" cy="77601"/>
+          </a:xfrm>
+          <a:prstGeom prst="rect">
+            <a:avLst/>
+          </a:prstGeom>
+          <a:solidFill>
+            <a:srgbClr val="0F8A6C"/>
+          </a:solidFill>
+          <a:ln w="12700">
+            <a:solidFill>
+              <a:srgbClr val="FFFFFF"/>
+            </a:solidFill>
+          </a:ln>
+          <a:effectLst/>
+        </p:spPr>
+        <p:style>
+          <a:lnRef idx="1">
+            <a:schemeClr val="accent1"/>
+          </a:lnRef>
+          <a:fillRef idx="3">
+            <a:schemeClr val="accent1"/>
+          </a:fillRef>
+          <a:effectRef idx="2">
+            <a:schemeClr val="accent1"/>
+          </a:effectRef>
+          <a:fontRef idx="minor">
+            <a:schemeClr val="lt1"/>
+          </a:fontRef>
+        </p:style>
+        <p:txBody>
+          <a:bodyPr rtlCol="0" anchor="ctr"/>
+          <a:lstStyle/>
+          <a:p>
+            <a:pPr algn="ctr"/>
+          </a:p>
+        </p:txBody>
+      </p:sp>
+      <p:sp>
+        <p:nvSpPr>
+          <p:cNvPr id="111" name="Rectangle 110"/>
+          <p:cNvSpPr/>
+          <p:nvPr/>
+        </p:nvSpPr>
+        <p:spPr>
+          <a:xfrm rot="2700000">
+            <a:off x="8408876" y="3618799"/>
+            <a:ext cx="77601" cy="77601"/>
+          </a:xfrm>
+          <a:prstGeom prst="rect">
+            <a:avLst/>
+          </a:prstGeom>
+          <a:solidFill>
+            <a:srgbClr val="0F8A6C"/>
+          </a:solidFill>
+          <a:ln w="12700">
+            <a:solidFill>
+              <a:srgbClr val="FFFFFF"/>
+            </a:solidFill>
+          </a:ln>
+          <a:effectLst/>
+        </p:spPr>
+        <p:style>
+          <a:lnRef idx="1">
+            <a:schemeClr val="accent1"/>
+          </a:lnRef>
+          <a:fillRef idx="3">
+            <a:schemeClr val="accent1"/>
+          </a:fillRef>
+          <a:effectRef idx="2">
+            <a:schemeClr val="accent1"/>
+          </a:effectRef>
+          <a:fontRef idx="minor">
+            <a:schemeClr val="lt1"/>
+          </a:fontRef>
+        </p:style>
+        <p:txBody>
+          <a:bodyPr rtlCol="0" anchor="ctr"/>
+          <a:lstStyle/>
+          <a:p>
+            <a:pPr algn="ctr"/>
+          </a:p>
+        </p:txBody>
+      </p:sp>
+      <p:sp>
+        <p:nvSpPr>
+          <p:cNvPr id="112" name="Rectangle 111"/>
+          <p:cNvSpPr/>
+          <p:nvPr/>
+        </p:nvSpPr>
+        <p:spPr>
+          <a:xfrm rot="2700000">
+            <a:off x="8871076" y="3602632"/>
+            <a:ext cx="109934" cy="109934"/>
+          </a:xfrm>
+          <a:prstGeom prst="rect">
+            <a:avLst/>
+          </a:prstGeom>
+          <a:solidFill>
+            <a:srgbClr val="0F8A6C"/>
+          </a:solidFill>
+          <a:ln w="12700">
+            <a:solidFill>
+              <a:srgbClr val="FFFFFF"/>
+            </a:solidFill>
+          </a:ln>
+          <a:effectLst/>
+        </p:spPr>
+        <p:style>
+          <a:lnRef idx="1">
+            <a:schemeClr val="accent1"/>
+          </a:lnRef>
+          <a:fillRef idx="3">
+            <a:schemeClr val="accent1"/>
+          </a:fillRef>
+          <a:effectRef idx="2">
+            <a:schemeClr val="accent1"/>
+          </a:effectRef>
+          <a:fontRef idx="minor">
+            <a:schemeClr val="lt1"/>
+          </a:fontRef>
+        </p:style>
+        <p:txBody>
+          <a:bodyPr rtlCol="0" anchor="ctr"/>
+          <a:lstStyle/>
+          <a:p>
+            <a:pPr algn="ctr"/>
+          </a:p>
+        </p:txBody>
+      </p:sp>
+      <p:sp>
+        <p:nvSpPr>
+          <p:cNvPr id="113" name="Rectangle 112"/>
+          <p:cNvSpPr/>
+          <p:nvPr/>
+        </p:nvSpPr>
+        <p:spPr>
+          <a:xfrm>
+            <a:off x="5841588" y="4638294"/>
+            <a:ext cx="5444526" cy="68580"/>
+          </a:xfrm>
+          <a:prstGeom prst="rect">
+            <a:avLst/>
+          </a:prstGeom>
+          <a:solidFill>
+            <a:srgbClr val="0F8A6C"/>
+          </a:solidFill>
+          <a:ln>
+            <a:noFill/>
+          </a:ln>
+          <a:effectLst/>
+        </p:spPr>
+        <p:style>
+          <a:lnRef idx="1">
+            <a:schemeClr val="accent1"/>
+          </a:lnRef>
+          <a:fillRef idx="3">
+            <a:schemeClr val="accent1"/>
+          </a:fillRef>
+          <a:effectRef idx="2">
+            <a:schemeClr val="accent1"/>
+          </a:effectRef>
+          <a:fontRef idx="minor">
+            <a:schemeClr val="lt1"/>
+          </a:fontRef>
+        </p:style>
+        <p:txBody>
+          <a:bodyPr rtlCol="0" anchor="ctr"/>
+          <a:lstStyle/>
+          <a:p>
+            <a:pPr algn="ctr"/>
+          </a:p>
+        </p:txBody>
+      </p:sp>
+      <p:cxnSp>
+        <p:nvCxnSpPr>
+          <p:cNvPr id="114" name="Connector 113"/>
+          <p:cNvCxnSpPr/>
+          <p:nvPr/>
+        </p:nvCxnSpPr>
+        <p:spPr>
+          <a:xfrm flipV="1">
+            <a:off x="5878164" y="4480560"/>
+            <a:ext cx="0" cy="128016"/>
+          </a:xfrm>
+          <a:prstGeom prst="line">
+            <a:avLst/>
+          </a:prstGeom>
+          <a:ln w="6350">
+            <a:solidFill>
+              <a:srgbClr val="B8BFC9"/>
+            </a:solidFill>
+          </a:ln>
+          <a:effectLst/>
+        </p:spPr>
+        <p:style>
+          <a:lnRef idx="2">
+            <a:schemeClr val="accent1"/>
+          </a:lnRef>
+          <a:fillRef idx="0">
+            <a:schemeClr val="accent1"/>
+          </a:fillRef>
+          <a:effectRef idx="1">
+            <a:schemeClr val="accent1"/>
+          </a:effectRef>
+          <a:fontRef idx="minor">
+            <a:schemeClr val="tx1"/>
+          </a:fontRef>
+        </p:style>
+      </p:cxnSp>
+      <p:sp>
+        <p:nvSpPr>
+          <p:cNvPr id="115" name="TextBox 114"/>
+          <p:cNvSpPr txBox="1"/>
+          <p:nvPr/>
+        </p:nvSpPr>
+        <p:spPr>
+          <a:xfrm>
+            <a:off x="5375244" y="4187952"/>
+            <a:ext cx="1005840" cy="292608"/>
+          </a:xfrm>
+          <a:prstGeom prst="rect">
+            <a:avLst/>
+          </a:prstGeom>
+          <a:noFill/>
+        </p:spPr>
+        <p:txBody>
+          <a:bodyPr wrap="none" anchor="b" lIns="0" rIns="0" tIns="0" bIns="0">
+            <a:spAutoFit/>
+          </a:bodyPr>
+          <a:lstStyle/>
+          <a:p>
+            <a:pPr algn="ctr"/>
+            <a:r>
+              <a:rPr sz="700" b="0">
+                <a:solidFill>
+                  <a:srgbClr val="5F6672"/>
+                </a:solidFill>
+                <a:latin typeface="Calibri"/>
+              </a:rPr>
+              <a:t>Testing</a:t>
+            </a:r>
+          </a:p>
+          <a:p>
+            <a:pPr algn="ctr"/>
+            <a:r>
+              <a:rPr sz="700" b="0">
+                <a:solidFill>
+                  <a:srgbClr val="5F6672"/>
+                </a:solidFill>
+                <a:latin typeface="Calibri"/>
+              </a:rPr>
+              <a:t>18-Apr-28</a:t>
+            </a:r>
+          </a:p>
+        </p:txBody>
+      </p:sp>
+      <p:cxnSp>
+        <p:nvCxnSpPr>
+          <p:cNvPr id="116" name="Connector 115"/>
+          <p:cNvCxnSpPr/>
+          <p:nvPr/>
+        </p:nvCxnSpPr>
+        <p:spPr>
+          <a:xfrm>
+            <a:off x="8160657" y="4736592"/>
+            <a:ext cx="0" cy="301752"/>
+          </a:xfrm>
+          <a:prstGeom prst="line">
+            <a:avLst/>
+          </a:prstGeom>
+          <a:ln w="6350">
+            <a:solidFill>
+              <a:srgbClr val="B8BFC9"/>
+            </a:solidFill>
+          </a:ln>
+          <a:effectLst/>
+        </p:spPr>
+        <p:style>
+          <a:lnRef idx="2">
+            <a:schemeClr val="accent1"/>
+          </a:lnRef>
+          <a:fillRef idx="0">
+            <a:schemeClr val="accent1"/>
+          </a:fillRef>
+          <a:effectRef idx="1">
+            <a:schemeClr val="accent1"/>
+          </a:effectRef>
+          <a:fontRef idx="minor">
+            <a:schemeClr val="tx1"/>
+          </a:fontRef>
+        </p:style>
+      </p:cxnSp>
+      <p:sp>
+        <p:nvSpPr>
+          <p:cNvPr id="117" name="TextBox 116"/>
+          <p:cNvSpPr txBox="1"/>
+          <p:nvPr/>
+        </p:nvSpPr>
+        <p:spPr>
+          <a:xfrm>
+            <a:off x="7657737" y="5038344"/>
+            <a:ext cx="1005840" cy="292608"/>
+          </a:xfrm>
+          <a:prstGeom prst="rect">
+            <a:avLst/>
+          </a:prstGeom>
+          <a:noFill/>
+        </p:spPr>
+        <p:txBody>
+          <a:bodyPr wrap="none" anchor="t" lIns="0" rIns="0" tIns="0" bIns="0">
+            <a:spAutoFit/>
+          </a:bodyPr>
+          <a:lstStyle/>
+          <a:p>
+            <a:pPr algn="ctr"/>
+            <a:r>
+              <a:rPr sz="700" b="1">
+                <a:solidFill>
+                  <a:srgbClr val="C00000"/>
+                </a:solidFill>
+                <a:latin typeface="Calibri"/>
+              </a:rPr>
+              <a:t>EC @25*</a:t>
+            </a:r>
+          </a:p>
+          <a:p>
+            <a:pPr algn="ctr"/>
+            <a:r>
+              <a:rPr sz="700" b="1">
+                <a:solidFill>
+                  <a:srgbClr val="C00000"/>
+                </a:solidFill>
+                <a:latin typeface="Calibri"/>
+              </a:rPr>
+              <a:t>02-Oct-28</a:t>
+            </a:r>
+          </a:p>
+        </p:txBody>
+      </p:sp>
+      <p:cxnSp>
+        <p:nvCxnSpPr>
+          <p:cNvPr id="118" name="Connector 117"/>
+          <p:cNvCxnSpPr/>
+          <p:nvPr/>
+        </p:nvCxnSpPr>
+        <p:spPr>
+          <a:xfrm flipV="1">
+            <a:off x="9500083" y="4306824"/>
+            <a:ext cx="0" cy="301752"/>
+          </a:xfrm>
+          <a:prstGeom prst="line">
+            <a:avLst/>
+          </a:prstGeom>
+          <a:ln w="6350">
+            <a:solidFill>
+              <a:srgbClr val="B8BFC9"/>
+            </a:solidFill>
+          </a:ln>
+          <a:effectLst/>
+        </p:spPr>
+        <p:style>
+          <a:lnRef idx="2">
+            <a:schemeClr val="accent1"/>
+          </a:lnRef>
+          <a:fillRef idx="0">
+            <a:schemeClr val="accent1"/>
+          </a:fillRef>
+          <a:effectRef idx="1">
+            <a:schemeClr val="accent1"/>
+          </a:effectRef>
+          <a:fontRef idx="minor">
+            <a:schemeClr val="tx1"/>
+          </a:fontRef>
+        </p:style>
+      </p:cxnSp>
+      <p:sp>
+        <p:nvSpPr>
+          <p:cNvPr id="119" name="TextBox 118"/>
+          <p:cNvSpPr txBox="1"/>
+          <p:nvPr/>
+        </p:nvSpPr>
+        <p:spPr>
+          <a:xfrm>
+            <a:off x="8997163" y="4014215"/>
+            <a:ext cx="1005840" cy="292608"/>
+          </a:xfrm>
+          <a:prstGeom prst="rect">
+            <a:avLst/>
+          </a:prstGeom>
+          <a:noFill/>
+        </p:spPr>
+        <p:txBody>
+          <a:bodyPr wrap="none" anchor="b" lIns="0" rIns="0" tIns="0" bIns="0">
+            <a:spAutoFit/>
+          </a:bodyPr>
+          <a:lstStyle/>
+          <a:p>
+            <a:pPr algn="ctr"/>
+            <a:r>
+              <a:rPr sz="700" b="0">
+                <a:solidFill>
+                  <a:srgbClr val="5F6672"/>
+                </a:solidFill>
+                <a:latin typeface="Calibri"/>
+              </a:rPr>
+              <a:t>SN Deliv.</a:t>
+            </a:r>
+          </a:p>
+          <a:p>
+            <a:pPr algn="ctr"/>
+            <a:r>
+              <a:rPr sz="700" b="0">
+                <a:solidFill>
+                  <a:srgbClr val="5F6672"/>
+                </a:solidFill>
+                <a:latin typeface="Calibri"/>
+              </a:rPr>
+              <a:t>08-Jan-29</a:t>
+            </a:r>
+          </a:p>
+        </p:txBody>
+      </p:sp>
+      <p:cxnSp>
+        <p:nvCxnSpPr>
+          <p:cNvPr id="120" name="Connector 119"/>
+          <p:cNvCxnSpPr/>
+          <p:nvPr/>
+        </p:nvCxnSpPr>
+        <p:spPr>
+          <a:xfrm>
+            <a:off x="9910112" y="4736592"/>
+            <a:ext cx="0" cy="128016"/>
+          </a:xfrm>
+          <a:prstGeom prst="line">
+            <a:avLst/>
+          </a:prstGeom>
+          <a:ln w="6350">
+            <a:solidFill>
+              <a:srgbClr val="B8BFC9"/>
+            </a:solidFill>
+          </a:ln>
+          <a:effectLst/>
+        </p:spPr>
+        <p:style>
+          <a:lnRef idx="2">
+            <a:schemeClr val="accent1"/>
+          </a:lnRef>
+          <a:fillRef idx="0">
+            <a:schemeClr val="accent1"/>
+          </a:fillRef>
+          <a:effectRef idx="1">
+            <a:schemeClr val="accent1"/>
+          </a:effectRef>
+          <a:fontRef idx="minor">
+            <a:schemeClr val="tx1"/>
+          </a:fontRef>
+        </p:style>
+      </p:cxnSp>
+      <p:sp>
+        <p:nvSpPr>
+          <p:cNvPr id="121" name="TextBox 120"/>
+          <p:cNvSpPr txBox="1"/>
+          <p:nvPr/>
+        </p:nvSpPr>
+        <p:spPr>
+          <a:xfrm>
+            <a:off x="9407192" y="4864608"/>
+            <a:ext cx="1005840" cy="292608"/>
+          </a:xfrm>
+          <a:prstGeom prst="rect">
+            <a:avLst/>
+          </a:prstGeom>
+          <a:noFill/>
+        </p:spPr>
+        <p:txBody>
+          <a:bodyPr wrap="none" anchor="t" lIns="0" rIns="0" tIns="0" bIns="0">
+            <a:spAutoFit/>
+          </a:bodyPr>
+          <a:lstStyle/>
+          <a:p>
+            <a:pPr algn="ctr"/>
+            <a:r>
+              <a:rPr sz="700" b="0">
+                <a:solidFill>
+                  <a:srgbClr val="5F6672"/>
+                </a:solidFill>
+                <a:latin typeface="Calibri"/>
+              </a:rPr>
+              <a:t>MTL Build</a:t>
+            </a:r>
+          </a:p>
+          <a:p>
+            <a:pPr algn="ctr"/>
+            <a:r>
+              <a:rPr sz="700" b="0">
+                <a:solidFill>
+                  <a:srgbClr val="5F6672"/>
+                </a:solidFill>
+                <a:latin typeface="Calibri"/>
+              </a:rPr>
+              <a:t>07-Feb-29</a:t>
+            </a:r>
+          </a:p>
+        </p:txBody>
+      </p:sp>
+      <p:cxnSp>
+        <p:nvCxnSpPr>
+          <p:cNvPr id="122" name="Connector 121"/>
+          <p:cNvCxnSpPr/>
+          <p:nvPr/>
+        </p:nvCxnSpPr>
+        <p:spPr>
+          <a:xfrm flipV="1">
+            <a:off x="10074123" y="4480560"/>
+            <a:ext cx="0" cy="128016"/>
+          </a:xfrm>
+          <a:prstGeom prst="line">
+            <a:avLst/>
+          </a:prstGeom>
+          <a:ln w="6350">
+            <a:solidFill>
+              <a:srgbClr val="B8BFC9"/>
+            </a:solidFill>
+          </a:ln>
+          <a:effectLst/>
+        </p:spPr>
+        <p:style>
+          <a:lnRef idx="2">
+            <a:schemeClr val="accent1"/>
+          </a:lnRef>
+          <a:fillRef idx="0">
+            <a:schemeClr val="accent1"/>
+          </a:fillRef>
+          <a:effectRef idx="1">
+            <a:schemeClr val="accent1"/>
+          </a:effectRef>
+          <a:fontRef idx="minor">
+            <a:schemeClr val="tx1"/>
+          </a:fontRef>
+        </p:style>
+      </p:cxnSp>
+      <p:sp>
+        <p:nvSpPr>
+          <p:cNvPr id="123" name="TextBox 122"/>
+          <p:cNvSpPr txBox="1"/>
+          <p:nvPr/>
+        </p:nvSpPr>
+        <p:spPr>
+          <a:xfrm>
+            <a:off x="9571203" y="4187952"/>
+            <a:ext cx="1005840" cy="292608"/>
+          </a:xfrm>
+          <a:prstGeom prst="rect">
+            <a:avLst/>
+          </a:prstGeom>
+          <a:noFill/>
+        </p:spPr>
+        <p:txBody>
+          <a:bodyPr wrap="none" anchor="b" lIns="0" rIns="0" tIns="0" bIns="0">
+            <a:spAutoFit/>
+          </a:bodyPr>
+          <a:lstStyle/>
+          <a:p>
+            <a:pPr algn="ctr"/>
+            <a:r>
+              <a:rPr sz="700" b="0">
+                <a:solidFill>
+                  <a:srgbClr val="5F6672"/>
+                </a:solidFill>
+                <a:latin typeface="Calibri"/>
+              </a:rPr>
+              <a:t>SN Release</a:t>
+            </a:r>
+          </a:p>
+          <a:p>
+            <a:pPr algn="ctr"/>
+            <a:r>
+              <a:rPr sz="700" b="0">
+                <a:solidFill>
+                  <a:srgbClr val="5F6672"/>
+                </a:solidFill>
+                <a:latin typeface="Calibri"/>
+              </a:rPr>
+              <a:t>19-Feb-29</a:t>
+            </a:r>
+          </a:p>
+        </p:txBody>
+      </p:sp>
+      <p:cxnSp>
+        <p:nvCxnSpPr>
+          <p:cNvPr id="124" name="Connector 123"/>
+          <p:cNvCxnSpPr/>
+          <p:nvPr/>
+        </p:nvCxnSpPr>
+        <p:spPr>
+          <a:xfrm>
+            <a:off x="10292805" y="4736592"/>
+            <a:ext cx="0" cy="301752"/>
+          </a:xfrm>
+          <a:prstGeom prst="line">
+            <a:avLst/>
+          </a:prstGeom>
+          <a:ln w="6350">
+            <a:solidFill>
+              <a:srgbClr val="B8BFC9"/>
+            </a:solidFill>
+          </a:ln>
+          <a:effectLst/>
+        </p:spPr>
+        <p:style>
+          <a:lnRef idx="2">
+            <a:schemeClr val="accent1"/>
+          </a:lnRef>
+          <a:fillRef idx="0">
+            <a:schemeClr val="accent1"/>
+          </a:fillRef>
+          <a:effectRef idx="1">
+            <a:schemeClr val="accent1"/>
+          </a:effectRef>
+          <a:fontRef idx="minor">
+            <a:schemeClr val="tx1"/>
+          </a:fontRef>
+        </p:style>
+      </p:cxnSp>
+      <p:sp>
+        <p:nvSpPr>
+          <p:cNvPr id="125" name="TextBox 124"/>
+          <p:cNvSpPr txBox="1"/>
+          <p:nvPr/>
+        </p:nvSpPr>
+        <p:spPr>
+          <a:xfrm>
+            <a:off x="9789885" y="5038344"/>
+            <a:ext cx="1005840" cy="292608"/>
+          </a:xfrm>
+          <a:prstGeom prst="rect">
+            <a:avLst/>
+          </a:prstGeom>
+          <a:noFill/>
+        </p:spPr>
+        <p:txBody>
+          <a:bodyPr wrap="none" anchor="t" lIns="0" rIns="0" tIns="0" bIns="0">
+            <a:spAutoFit/>
+          </a:bodyPr>
+          <a:lstStyle/>
+          <a:p>
+            <a:pPr algn="ctr"/>
+            <a:r>
+              <a:rPr sz="700" b="0">
+                <a:solidFill>
+                  <a:srgbClr val="5F6672"/>
+                </a:solidFill>
+                <a:latin typeface="Calibri"/>
+              </a:rPr>
+              <a:t>MTL EC</a:t>
+            </a:r>
+          </a:p>
+          <a:p>
+            <a:pPr algn="ctr"/>
+            <a:r>
+              <a:rPr sz="700" b="0">
+                <a:solidFill>
+                  <a:srgbClr val="5F6672"/>
+                </a:solidFill>
+                <a:latin typeface="Calibri"/>
+              </a:rPr>
+              <a:t>07-Mar-29</a:t>
+            </a:r>
+          </a:p>
+        </p:txBody>
+      </p:sp>
+      <p:cxnSp>
+        <p:nvCxnSpPr>
+          <p:cNvPr id="126" name="Connector 125"/>
+          <p:cNvCxnSpPr/>
+          <p:nvPr/>
+        </p:nvCxnSpPr>
+        <p:spPr>
+          <a:xfrm flipV="1">
+            <a:off x="10771172" y="4306824"/>
+            <a:ext cx="0" cy="301752"/>
+          </a:xfrm>
+          <a:prstGeom prst="line">
+            <a:avLst/>
+          </a:prstGeom>
+          <a:ln w="6350">
+            <a:solidFill>
+              <a:srgbClr val="B8BFC9"/>
+            </a:solidFill>
+          </a:ln>
+          <a:effectLst/>
+        </p:spPr>
+        <p:style>
+          <a:lnRef idx="2">
+            <a:schemeClr val="accent1"/>
+          </a:lnRef>
+          <a:fillRef idx="0">
+            <a:schemeClr val="accent1"/>
+          </a:fillRef>
+          <a:effectRef idx="1">
+            <a:schemeClr val="accent1"/>
+          </a:effectRef>
+          <a:fontRef idx="minor">
+            <a:schemeClr val="tx1"/>
+          </a:fontRef>
+        </p:style>
+      </p:cxnSp>
+      <p:sp>
+        <p:nvSpPr>
+          <p:cNvPr id="127" name="TextBox 126"/>
+          <p:cNvSpPr txBox="1"/>
+          <p:nvPr/>
+        </p:nvSpPr>
+        <p:spPr>
+          <a:xfrm>
+            <a:off x="10268252" y="4014215"/>
+            <a:ext cx="1005840" cy="292608"/>
+          </a:xfrm>
+          <a:prstGeom prst="rect">
+            <a:avLst/>
+          </a:prstGeom>
+          <a:noFill/>
+        </p:spPr>
+        <p:txBody>
+          <a:bodyPr wrap="none" anchor="b" lIns="0" rIns="0" tIns="0" bIns="0">
+            <a:spAutoFit/>
+          </a:bodyPr>
+          <a:lstStyle/>
+          <a:p>
+            <a:pPr algn="ctr"/>
+            <a:r>
+              <a:rPr sz="700" b="0">
+                <a:solidFill>
+                  <a:srgbClr val="5F6672"/>
+                </a:solidFill>
+                <a:latin typeface="Calibri"/>
+              </a:rPr>
+              <a:t>Agency</a:t>
+            </a:r>
+          </a:p>
+          <a:p>
+            <a:pPr algn="ctr"/>
+            <a:r>
+              <a:rPr sz="700" b="0">
+                <a:solidFill>
+                  <a:srgbClr val="5F6672"/>
+                </a:solidFill>
+                <a:latin typeface="Calibri"/>
+              </a:rPr>
+              <a:t>11-Apr-29</a:t>
+            </a:r>
+          </a:p>
+        </p:txBody>
+      </p:sp>
+      <p:cxnSp>
+        <p:nvCxnSpPr>
+          <p:cNvPr id="128" name="Connector 127"/>
+          <p:cNvCxnSpPr/>
+          <p:nvPr/>
+        </p:nvCxnSpPr>
+        <p:spPr>
+          <a:xfrm>
+            <a:off x="11249539" y="4736592"/>
+            <a:ext cx="0" cy="128016"/>
+          </a:xfrm>
+          <a:prstGeom prst="line">
+            <a:avLst/>
+          </a:prstGeom>
+          <a:ln w="6350">
+            <a:solidFill>
+              <a:srgbClr val="B8BFC9"/>
+            </a:solidFill>
+          </a:ln>
+          <a:effectLst/>
+        </p:spPr>
+        <p:style>
+          <a:lnRef idx="2">
+            <a:schemeClr val="accent1"/>
+          </a:lnRef>
+          <a:fillRef idx="0">
+            <a:schemeClr val="accent1"/>
+          </a:fillRef>
+          <a:effectRef idx="1">
+            <a:schemeClr val="accent1"/>
+          </a:effectRef>
+          <a:fontRef idx="minor">
+            <a:schemeClr val="tx1"/>
+          </a:fontRef>
+        </p:style>
+      </p:cxnSp>
+      <p:sp>
+        <p:nvSpPr>
+          <p:cNvPr id="129" name="TextBox 128"/>
+          <p:cNvSpPr txBox="1"/>
+          <p:nvPr/>
+        </p:nvSpPr>
+        <p:spPr>
+          <a:xfrm>
+            <a:off x="10746619" y="4864608"/>
+            <a:ext cx="1005840" cy="292608"/>
+          </a:xfrm>
+          <a:prstGeom prst="rect">
+            <a:avLst/>
+          </a:prstGeom>
+          <a:noFill/>
+        </p:spPr>
+        <p:txBody>
+          <a:bodyPr wrap="none" anchor="t" lIns="0" rIns="0" tIns="0" bIns="0">
+            <a:spAutoFit/>
+          </a:bodyPr>
+          <a:lstStyle/>
+          <a:p>
+            <a:pPr algn="ctr"/>
+            <a:r>
+              <a:rPr sz="750" b="1">
+                <a:solidFill>
+                  <a:srgbClr val="262626"/>
+                </a:solidFill>
+                <a:latin typeface="Calibri"/>
+              </a:rPr>
+              <a:t>1st Prod</a:t>
+            </a:r>
+          </a:p>
+          <a:p>
+            <a:pPr algn="ctr"/>
+            <a:r>
+              <a:rPr sz="750" b="1">
+                <a:solidFill>
+                  <a:srgbClr val="262626"/>
+                </a:solidFill>
+                <a:latin typeface="Calibri"/>
+              </a:rPr>
+              <a:t>16-May-29</a:t>
+            </a:r>
+          </a:p>
+        </p:txBody>
+      </p:sp>
+      <p:sp>
+        <p:nvSpPr>
+          <p:cNvPr id="130" name="Rectangle 129"/>
+          <p:cNvSpPr/>
+          <p:nvPr/>
+        </p:nvSpPr>
+        <p:spPr>
+          <a:xfrm rot="2700000">
+            <a:off x="5839364" y="4633783"/>
+            <a:ext cx="77601" cy="77601"/>
+          </a:xfrm>
+          <a:prstGeom prst="rect">
+            <a:avLst/>
+          </a:prstGeom>
+          <a:solidFill>
+            <a:srgbClr val="0F8A6C"/>
+          </a:solidFill>
+          <a:ln w="12700">
+            <a:solidFill>
+              <a:srgbClr val="FFFFFF"/>
+            </a:solidFill>
+          </a:ln>
+          <a:effectLst/>
+        </p:spPr>
+        <p:style>
+          <a:lnRef idx="1">
+            <a:schemeClr val="accent1"/>
+          </a:lnRef>
+          <a:fillRef idx="3">
+            <a:schemeClr val="accent1"/>
+          </a:fillRef>
+          <a:effectRef idx="2">
+            <a:schemeClr val="accent1"/>
+          </a:effectRef>
+          <a:fontRef idx="minor">
+            <a:schemeClr val="lt1"/>
+          </a:fontRef>
+        </p:style>
+        <p:txBody>
+          <a:bodyPr rtlCol="0" anchor="ctr"/>
+          <a:lstStyle/>
+          <a:p>
+            <a:pPr algn="ctr"/>
+          </a:p>
+        </p:txBody>
+      </p:sp>
+      <p:sp>
+        <p:nvSpPr>
+          <p:cNvPr id="131" name="Rectangle 130"/>
+          <p:cNvSpPr/>
+          <p:nvPr/>
+        </p:nvSpPr>
+        <p:spPr>
+          <a:xfrm rot="2700000">
+            <a:off x="8121856" y="4633783"/>
+            <a:ext cx="77601" cy="77601"/>
+          </a:xfrm>
+          <a:prstGeom prst="rect">
+            <a:avLst/>
+          </a:prstGeom>
+          <a:solidFill>
+            <a:srgbClr val="C00000"/>
+          </a:solidFill>
+          <a:ln w="12700">
+            <a:solidFill>
+              <a:srgbClr val="FFFFFF"/>
+            </a:solidFill>
+          </a:ln>
+          <a:effectLst/>
+        </p:spPr>
+        <p:style>
+          <a:lnRef idx="1">
+            <a:schemeClr val="accent1"/>
+          </a:lnRef>
+          <a:fillRef idx="3">
+            <a:schemeClr val="accent1"/>
+          </a:fillRef>
+          <a:effectRef idx="2">
+            <a:schemeClr val="accent1"/>
+          </a:effectRef>
+          <a:fontRef idx="minor">
+            <a:schemeClr val="lt1"/>
+          </a:fontRef>
+        </p:style>
+        <p:txBody>
+          <a:bodyPr rtlCol="0" anchor="ctr"/>
+          <a:lstStyle/>
+          <a:p>
+            <a:pPr algn="ctr"/>
+          </a:p>
+        </p:txBody>
+      </p:sp>
+      <p:sp>
+        <p:nvSpPr>
+          <p:cNvPr id="132" name="Rectangle 131"/>
+          <p:cNvSpPr/>
+          <p:nvPr/>
+        </p:nvSpPr>
+        <p:spPr>
+          <a:xfrm rot="2700000">
+            <a:off x="9461283" y="4633783"/>
+            <a:ext cx="77601" cy="77601"/>
+          </a:xfrm>
+          <a:prstGeom prst="rect">
+            <a:avLst/>
+          </a:prstGeom>
+          <a:solidFill>
+            <a:srgbClr val="0F8A6C"/>
+          </a:solidFill>
+          <a:ln w="12700">
+            <a:solidFill>
+              <a:srgbClr val="FFFFFF"/>
+            </a:solidFill>
+          </a:ln>
+          <a:effectLst/>
+        </p:spPr>
+        <p:style>
+          <a:lnRef idx="1">
+            <a:schemeClr val="accent1"/>
+          </a:lnRef>
+          <a:fillRef idx="3">
+            <a:schemeClr val="accent1"/>
+          </a:fillRef>
+          <a:effectRef idx="2">
+            <a:schemeClr val="accent1"/>
+          </a:effectRef>
+          <a:fontRef idx="minor">
+            <a:schemeClr val="lt1"/>
+          </a:fontRef>
+        </p:style>
+        <p:txBody>
+          <a:bodyPr rtlCol="0" anchor="ctr"/>
+          <a:lstStyle/>
+          <a:p>
+            <a:pPr algn="ctr"/>
+          </a:p>
+        </p:txBody>
+      </p:sp>
+      <p:sp>
+        <p:nvSpPr>
+          <p:cNvPr id="133" name="Rectangle 132"/>
+          <p:cNvSpPr/>
+          <p:nvPr/>
+        </p:nvSpPr>
+        <p:spPr>
+          <a:xfrm rot="2700000">
+            <a:off x="9871311" y="4633783"/>
+            <a:ext cx="77601" cy="77601"/>
+          </a:xfrm>
+          <a:prstGeom prst="rect">
+            <a:avLst/>
+          </a:prstGeom>
+          <a:solidFill>
+            <a:srgbClr val="0F8A6C"/>
+          </a:solidFill>
+          <a:ln w="12700">
+            <a:solidFill>
+              <a:srgbClr val="FFFFFF"/>
+            </a:solidFill>
+          </a:ln>
+          <a:effectLst/>
+        </p:spPr>
+        <p:style>
+          <a:lnRef idx="1">
+            <a:schemeClr val="accent1"/>
+          </a:lnRef>
+          <a:fillRef idx="3">
+            <a:schemeClr val="accent1"/>
+          </a:fillRef>
+          <a:effectRef idx="2">
+            <a:schemeClr val="accent1"/>
+          </a:effectRef>
+          <a:fontRef idx="minor">
+            <a:schemeClr val="lt1"/>
+          </a:fontRef>
+        </p:style>
+        <p:txBody>
+          <a:bodyPr rtlCol="0" anchor="ctr"/>
+          <a:lstStyle/>
+          <a:p>
+            <a:pPr algn="ctr"/>
+          </a:p>
+        </p:txBody>
+      </p:sp>
+      <p:sp>
+        <p:nvSpPr>
+          <p:cNvPr id="134" name="Rectangle 133"/>
+          <p:cNvSpPr/>
+          <p:nvPr/>
+        </p:nvSpPr>
+        <p:spPr>
+          <a:xfrm rot="2700000">
+            <a:off x="10035323" y="4633783"/>
+            <a:ext cx="77601" cy="77601"/>
+          </a:xfrm>
+          <a:prstGeom prst="rect">
+            <a:avLst/>
+          </a:prstGeom>
+          <a:solidFill>
+            <a:srgbClr val="0F8A6C"/>
+          </a:solidFill>
+          <a:ln w="12700">
+            <a:solidFill>
+              <a:srgbClr val="FFFFFF"/>
+            </a:solidFill>
+          </a:ln>
+          <a:effectLst/>
+        </p:spPr>
+        <p:style>
+          <a:lnRef idx="1">
+            <a:schemeClr val="accent1"/>
+          </a:lnRef>
+          <a:fillRef idx="3">
+            <a:schemeClr val="accent1"/>
+          </a:fillRef>
+          <a:effectRef idx="2">
+            <a:schemeClr val="accent1"/>
+          </a:effectRef>
+          <a:fontRef idx="minor">
+            <a:schemeClr val="lt1"/>
+          </a:fontRef>
+        </p:style>
+        <p:txBody>
+          <a:bodyPr rtlCol="0" anchor="ctr"/>
+          <a:lstStyle/>
+          <a:p>
+            <a:pPr algn="ctr"/>
+          </a:p>
+        </p:txBody>
+      </p:sp>
+      <p:sp>
+        <p:nvSpPr>
+          <p:cNvPr id="135" name="Rectangle 134"/>
+          <p:cNvSpPr/>
+          <p:nvPr/>
+        </p:nvSpPr>
+        <p:spPr>
+          <a:xfrm rot="2700000">
+            <a:off x="10254005" y="4633783"/>
+            <a:ext cx="77601" cy="77601"/>
+          </a:xfrm>
+          <a:prstGeom prst="rect">
+            <a:avLst/>
+          </a:prstGeom>
+          <a:solidFill>
+            <a:srgbClr val="0F8A6C"/>
+          </a:solidFill>
+          <a:ln w="12700">
+            <a:solidFill>
+              <a:srgbClr val="FFFFFF"/>
+            </a:solidFill>
+          </a:ln>
+          <a:effectLst/>
+        </p:spPr>
+        <p:style>
+          <a:lnRef idx="1">
+            <a:schemeClr val="accent1"/>
+          </a:lnRef>
+          <a:fillRef idx="3">
+            <a:schemeClr val="accent1"/>
+          </a:fillRef>
+          <a:effectRef idx="2">
+            <a:schemeClr val="accent1"/>
+          </a:effectRef>
+          <a:fontRef idx="minor">
+            <a:schemeClr val="lt1"/>
+          </a:fontRef>
+        </p:style>
+        <p:txBody>
+          <a:bodyPr rtlCol="0" anchor="ctr"/>
+          <a:lstStyle/>
+          <a:p>
+            <a:pPr algn="ctr"/>
+          </a:p>
+        </p:txBody>
+      </p:sp>
+      <p:sp>
+        <p:nvSpPr>
+          <p:cNvPr id="136" name="Rectangle 135"/>
+          <p:cNvSpPr/>
+          <p:nvPr/>
+        </p:nvSpPr>
+        <p:spPr>
+          <a:xfrm rot="2700000">
+            <a:off x="10732371" y="4633783"/>
+            <a:ext cx="77601" cy="77601"/>
+          </a:xfrm>
+          <a:prstGeom prst="rect">
+            <a:avLst/>
+          </a:prstGeom>
+          <a:solidFill>
+            <a:srgbClr val="0F8A6C"/>
+          </a:solidFill>
+          <a:ln w="12700">
+            <a:solidFill>
+              <a:srgbClr val="FFFFFF"/>
+            </a:solidFill>
+          </a:ln>
+          <a:effectLst/>
+        </p:spPr>
+        <p:style>
+          <a:lnRef idx="1">
+            <a:schemeClr val="accent1"/>
+          </a:lnRef>
+          <a:fillRef idx="3">
+            <a:schemeClr val="accent1"/>
+          </a:fillRef>
+          <a:effectRef idx="2">
+            <a:schemeClr val="accent1"/>
+          </a:effectRef>
+          <a:fontRef idx="minor">
+            <a:schemeClr val="lt1"/>
+          </a:fontRef>
+        </p:style>
+        <p:txBody>
+          <a:bodyPr rtlCol="0" anchor="ctr"/>
+          <a:lstStyle/>
+          <a:p>
+            <a:pPr algn="ctr"/>
+          </a:p>
+        </p:txBody>
+      </p:sp>
+      <p:sp>
+        <p:nvSpPr>
+          <p:cNvPr id="137" name="Rectangle 136"/>
+          <p:cNvSpPr/>
+          <p:nvPr/>
+        </p:nvSpPr>
+        <p:spPr>
+          <a:xfrm rot="2700000">
+            <a:off x="11194571" y="4617616"/>
+            <a:ext cx="109934" cy="109934"/>
+          </a:xfrm>
+          <a:prstGeom prst="rect">
+            <a:avLst/>
+          </a:prstGeom>
+          <a:solidFill>
+            <a:srgbClr val="0F8A6C"/>
+          </a:solidFill>
+          <a:ln w="12700">
+            <a:solidFill>
+              <a:srgbClr val="FFFFFF"/>
+            </a:solidFill>
+          </a:ln>
+          <a:effectLst/>
+        </p:spPr>
+        <p:style>
+          <a:lnRef idx="1">
+            <a:schemeClr val="accent1"/>
+          </a:lnRef>
+          <a:fillRef idx="3">
+            <a:schemeClr val="accent1"/>
+          </a:fillRef>
+          <a:effectRef idx="2">
+            <a:schemeClr val="accent1"/>
+          </a:effectRef>
+          <a:fontRef idx="minor">
+            <a:schemeClr val="lt1"/>
+          </a:fontRef>
+        </p:style>
+        <p:txBody>
+          <a:bodyPr rtlCol="0" anchor="ctr"/>
+          <a:lstStyle/>
+          <a:p>
+            <a:pPr algn="ctr"/>
+          </a:p>
+        </p:txBody>
+      </p:sp>
+      <p:sp>
+        <p:nvSpPr>
+          <p:cNvPr id="138" name="TextBox 137"/>
           <p:cNvSpPr txBox="1"/>
           <p:nvPr/>
         </p:nvSpPr>
@@ -4832,7 +10453,7 @@
       </p:sp>
       <p:sp>
         <p:nvSpPr>
-          <p:cNvPr id="5" name="TextBox 4"/>
+          <p:cNvPr id="139" name="TextBox 138"/>
           <p:cNvSpPr txBox="1"/>
           <p:nvPr/>
         </p:nvSpPr>
